--- a/00 Admin/06 Presentations/JP_TapThat_ThePivot_v03.pptx
+++ b/00 Admin/06 Presentations/JP_TapThat_ThePivot_v03.pptx
@@ -2388,40 +2388,16 @@
           <a:chExt cx="0" cy="0"/>
         </a:xfrm>
       </p:grpSpPr>
-      <p:pic>
-        <p:nvPicPr>
-          <p:cNvPr id="2" name="Image 0" descr="/home/user/tapthatbrewery/00 Admin/06 Presentations/pivot/build-jp/jp-title.jpg">    </p:cNvPr>
-          <p:cNvPicPr>
-            <a:picLocks noChangeAspect="1"/>
-          </p:cNvPicPr>
-          <p:nvPr/>
-        </p:nvPicPr>
-        <p:blipFill>
-          <a:blip r:embed="rId1"/>
-          <a:stretch>
-            <a:fillRect/>
-          </a:stretch>
-        </p:blipFill>
-        <p:spPr>
-          <a:xfrm>
-            <a:off x="7071055" y="0"/>
-            <a:ext cx="5120640" cy="6858000"/>
-          </a:xfrm>
-          <a:prstGeom prst="rect">
-            <a:avLst/>
-          </a:prstGeom>
-        </p:spPr>
-      </p:pic>
-      <p:sp>
-        <p:nvSpPr>
-          <p:cNvPr id="3" name="Text 0"/>
+      <p:sp>
+        <p:nvSpPr>
+          <p:cNvPr id="2" name="Text 0"/>
           <p:cNvSpPr txBox="1"/>
           <p:nvPr/>
         </p:nvSpPr>
         <p:spPr>
           <a:xfrm>
             <a:off x="914400" y="365760"/>
-            <a:ext cx="5608015" cy="219456"/>
+            <a:ext cx="10362895" cy="219456"/>
           </a:xfrm>
           <a:prstGeom prst="rect">
             <a:avLst/>
@@ -2438,45 +2414,6 @@
             </a:pPr>
             <a:r>
               <a:rPr lang="en-US" sz="900" spc="200" kern="0" dirty="0">
-                <a:solidFill>
-                  <a:srgbClr val="111111"/>
-                </a:solidFill>
-                <a:latin typeface="Poppins Medium" pitchFamily="34" charset="0"/>
-                <a:ea typeface="Poppins Medium" pitchFamily="34" charset="-122"/>
-                <a:cs typeface="Poppins Medium" pitchFamily="34" charset="-120"/>
-              </a:rPr>
-              <a:t>JP · TAP THAT · THE PIVOT</a:t>
-            </a:r>
-            <a:endParaRPr lang="en-US" sz="900" dirty="0"/>
-          </a:p>
-        </p:txBody>
-      </p:sp>
-      <p:sp>
-        <p:nvSpPr>
-          <p:cNvPr id="4" name="Text 1"/>
-          <p:cNvSpPr txBox="1"/>
-          <p:nvPr/>
-        </p:nvSpPr>
-        <p:spPr>
-          <a:xfrm>
-            <a:off x="841248" y="3703320"/>
-            <a:ext cx="5608015" cy="1051560"/>
-          </a:xfrm>
-          <a:prstGeom prst="rect">
-            <a:avLst/>
-          </a:prstGeom>
-          <a:noFill/>
-          <a:ln/>
-        </p:spPr>
-        <p:txBody>
-          <a:bodyPr wrap="square" lIns="0" tIns="0" rIns="0" bIns="0" rtlCol="0" anchor="ctr"/>
-          <a:lstStyle/>
-          <a:p>
-            <a:pPr indent="0" marL="0">
-              <a:buNone/>
-            </a:pPr>
-            <a:r>
-              <a:rPr lang="en-US" sz="7200" dirty="0">
                 <a:solidFill>
                   <a:srgbClr val="111111"/>
                 </a:solidFill>
@@ -2484,6 +2421,45 @@
                 <a:ea typeface="Poppins SemiBold" pitchFamily="34" charset="-122"/>
                 <a:cs typeface="Poppins SemiBold" pitchFamily="34" charset="-120"/>
               </a:rPr>
+              <a:t>JP · TAP THAT · THE PIVOT</a:t>
+            </a:r>
+            <a:endParaRPr lang="en-US" sz="900" dirty="0"/>
+          </a:p>
+        </p:txBody>
+      </p:sp>
+      <p:sp>
+        <p:nvSpPr>
+          <p:cNvPr id="3" name="Text 1"/>
+          <p:cNvSpPr txBox="1"/>
+          <p:nvPr/>
+        </p:nvSpPr>
+        <p:spPr>
+          <a:xfrm>
+            <a:off x="914400" y="4041648"/>
+            <a:ext cx="10362895" cy="1051560"/>
+          </a:xfrm>
+          <a:prstGeom prst="rect">
+            <a:avLst/>
+          </a:prstGeom>
+          <a:noFill/>
+          <a:ln/>
+        </p:spPr>
+        <p:txBody>
+          <a:bodyPr wrap="square" lIns="0" tIns="0" rIns="0" bIns="0" rtlCol="0" anchor="ctr"/>
+          <a:lstStyle/>
+          <a:p>
+            <a:pPr indent="0" marL="0">
+              <a:buNone/>
+            </a:pPr>
+            <a:r>
+              <a:rPr lang="en-US" sz="7200" dirty="0">
+                <a:solidFill>
+                  <a:srgbClr val="111111"/>
+                </a:solidFill>
+                <a:latin typeface="Poppins SemiBold" pitchFamily="34" charset="0"/>
+                <a:ea typeface="Poppins SemiBold" pitchFamily="34" charset="-122"/>
+                <a:cs typeface="Poppins SemiBold" pitchFamily="34" charset="-120"/>
+              </a:rPr>
               <a:t>The Pivot</a:t>
             </a:r>
             <a:endParaRPr lang="en-US" sz="7200" dirty="0"/>
@@ -2492,14 +2468,14 @@
       </p:sp>
       <p:sp>
         <p:nvSpPr>
-          <p:cNvPr id="5" name="Text 2"/>
-          <p:cNvSpPr txBox="1"/>
-          <p:nvPr/>
-        </p:nvSpPr>
-        <p:spPr>
-          <a:xfrm>
-            <a:off x="914400" y="4846320"/>
-            <a:ext cx="5608015" cy="914400"/>
+          <p:cNvPr id="4" name="Text 2"/>
+          <p:cNvSpPr txBox="1"/>
+          <p:nvPr/>
+        </p:nvSpPr>
+        <p:spPr>
+          <a:xfrm>
+            <a:off x="914400" y="5193792"/>
+            <a:ext cx="10362895" cy="457200"/>
           </a:xfrm>
           <a:prstGeom prst="rect">
             <a:avLst/>
@@ -2512,36 +2488,33 @@
           <a:lstStyle/>
           <a:p>
             <a:pPr indent="0" marL="0">
-              <a:lnSpc>
-                <a:spcPct val="120000"/>
-              </a:lnSpc>
-              <a:buNone/>
-            </a:pPr>
-            <a:r>
-              <a:rPr lang="en-US" sz="2400" dirty="0">
+              <a:buNone/>
+            </a:pPr>
+            <a:r>
+              <a:rPr lang="en-US" sz="2800" dirty="0">
                 <a:solidFill>
                   <a:srgbClr val="111111"/>
                 </a:solidFill>
-                <a:latin typeface="Poppins Light" pitchFamily="34" charset="0"/>
-                <a:ea typeface="Poppins Light" pitchFamily="34" charset="-122"/>
-                <a:cs typeface="Poppins Light" pitchFamily="34" charset="-120"/>
+                <a:latin typeface="Poppins" pitchFamily="34" charset="0"/>
+                <a:ea typeface="Poppins" pitchFamily="34" charset="-122"/>
+                <a:cs typeface="Poppins" pitchFamily="34" charset="-120"/>
               </a:rPr>
               <a:t>From vanity to sanity. A strategic evolution, not a rebrand.</a:t>
             </a:r>
-            <a:endParaRPr lang="en-US" sz="2400" dirty="0"/>
-          </a:p>
-        </p:txBody>
-      </p:sp>
-      <p:sp>
-        <p:nvSpPr>
-          <p:cNvPr id="6" name="Text 3"/>
-          <p:cNvSpPr txBox="1"/>
-          <p:nvPr/>
-        </p:nvSpPr>
-        <p:spPr>
-          <a:xfrm>
-            <a:off x="914400" y="5989320"/>
-            <a:ext cx="5608015" cy="274320"/>
+            <a:endParaRPr lang="en-US" sz="2800" dirty="0"/>
+          </a:p>
+        </p:txBody>
+      </p:sp>
+      <p:sp>
+        <p:nvSpPr>
+          <p:cNvPr id="5" name="Text 3"/>
+          <p:cNvSpPr txBox="1"/>
+          <p:nvPr/>
+        </p:nvSpPr>
+        <p:spPr>
+          <a:xfrm>
+            <a:off x="914400" y="5943600"/>
+            <a:ext cx="10362895" cy="274320"/>
           </a:xfrm>
           <a:prstGeom prst="rect">
             <a:avLst/>
@@ -2632,9 +2605,9 @@
                 <a:solidFill>
                   <a:srgbClr val="111111"/>
                 </a:solidFill>
-                <a:latin typeface="Poppins Medium" pitchFamily="34" charset="0"/>
-                <a:ea typeface="Poppins Medium" pitchFamily="34" charset="-122"/>
-                <a:cs typeface="Poppins Medium" pitchFamily="34" charset="-120"/>
+                <a:latin typeface="Poppins SemiBold" pitchFamily="34" charset="0"/>
+                <a:ea typeface="Poppins SemiBold" pitchFamily="34" charset="-122"/>
+                <a:cs typeface="Poppins SemiBold" pitchFamily="34" charset="-120"/>
               </a:rPr>
               <a:t>PART 02 · DIRECTION</a:t>
             </a:r>
@@ -2674,9 +2647,9 @@
                 <a:solidFill>
                   <a:srgbClr val="111111"/>
                 </a:solidFill>
-                <a:latin typeface="Poppins Medium" pitchFamily="34" charset="0"/>
-                <a:ea typeface="Poppins Medium" pitchFamily="34" charset="-122"/>
-                <a:cs typeface="Poppins Medium" pitchFamily="34" charset="-120"/>
+                <a:latin typeface="Poppins SemiBold" pitchFamily="34" charset="0"/>
+                <a:ea typeface="Poppins SemiBold" pitchFamily="34" charset="-122"/>
+                <a:cs typeface="Poppins SemiBold" pitchFamily="34" charset="-120"/>
               </a:rPr>
               <a:t>Once the core is running, extend it.</a:t>
             </a:r>
@@ -2726,16 +2699,16 @@
                           <a:solidFill>
                             <a:srgbClr val="111111"/>
                           </a:solidFill>
-                          <a:latin typeface="Poppins Medium" pitchFamily="34" charset="0"/>
-                          <a:ea typeface="Poppins Medium" pitchFamily="34" charset="-122"/>
-                          <a:cs typeface="Poppins Medium" pitchFamily="34" charset="-120"/>
+                          <a:latin typeface="Poppins SemiBold" pitchFamily="34" charset="0"/>
+                          <a:ea typeface="Poppins SemiBold" pitchFamily="34" charset="-122"/>
+                          <a:cs typeface="Poppins SemiBold" pitchFamily="34" charset="-120"/>
                         </a:rPr>
                         <a:t>MOVE</a:t>
                       </a:r>
                       <a:endParaRPr lang="en-US" sz="900" dirty="0">
-                        <a:latin typeface="Poppins Medium" charset="0"/>
-                        <a:ea typeface="Poppins Medium" charset="0"/>
-                        <a:cs typeface="Poppins Medium" charset="0"/>
+                        <a:latin typeface="Poppins SemiBold" charset="0"/>
+                        <a:ea typeface="Poppins SemiBold" charset="0"/>
+                        <a:cs typeface="Poppins SemiBold" charset="0"/>
                       </a:endParaRPr>
                     </a:p>
                   </a:txBody>
@@ -2776,16 +2749,16 @@
                           <a:solidFill>
                             <a:srgbClr val="111111"/>
                           </a:solidFill>
-                          <a:latin typeface="Poppins Medium" pitchFamily="34" charset="0"/>
-                          <a:ea typeface="Poppins Medium" pitchFamily="34" charset="-122"/>
-                          <a:cs typeface="Poppins Medium" pitchFamily="34" charset="-120"/>
+                          <a:latin typeface="Poppins SemiBold" pitchFamily="34" charset="0"/>
+                          <a:ea typeface="Poppins SemiBold" pitchFamily="34" charset="-122"/>
+                          <a:cs typeface="Poppins SemiBold" pitchFamily="34" charset="-120"/>
                         </a:rPr>
                         <a:t>THE SHIFT</a:t>
                       </a:r>
                       <a:endParaRPr lang="en-US" sz="900" dirty="0">
-                        <a:latin typeface="Poppins Medium" charset="0"/>
-                        <a:ea typeface="Poppins Medium" charset="0"/>
-                        <a:cs typeface="Poppins Medium" charset="0"/>
+                        <a:latin typeface="Poppins SemiBold" charset="0"/>
+                        <a:ea typeface="Poppins SemiBold" charset="0"/>
+                        <a:cs typeface="Poppins SemiBold" charset="0"/>
                       </a:endParaRPr>
                     </a:p>
                   </a:txBody>
@@ -2826,16 +2799,16 @@
                           <a:solidFill>
                             <a:srgbClr val="111111"/>
                           </a:solidFill>
-                          <a:latin typeface="Poppins Medium" pitchFamily="34" charset="0"/>
-                          <a:ea typeface="Poppins Medium" pitchFamily="34" charset="-122"/>
-                          <a:cs typeface="Poppins Medium" pitchFamily="34" charset="-120"/>
+                          <a:latin typeface="Poppins SemiBold" pitchFamily="34" charset="0"/>
+                          <a:ea typeface="Poppins SemiBold" pitchFamily="34" charset="-122"/>
+                          <a:cs typeface="Poppins SemiBold" pitchFamily="34" charset="-120"/>
                         </a:rPr>
                         <a:t>PROOF</a:t>
                       </a:r>
                       <a:endParaRPr lang="en-US" sz="900" dirty="0">
-                        <a:latin typeface="Poppins Medium" charset="0"/>
-                        <a:ea typeface="Poppins Medium" charset="0"/>
-                        <a:cs typeface="Poppins Medium" charset="0"/>
+                        <a:latin typeface="Poppins SemiBold" charset="0"/>
+                        <a:ea typeface="Poppins SemiBold" charset="0"/>
+                        <a:cs typeface="Poppins SemiBold" charset="0"/>
                       </a:endParaRPr>
                     </a:p>
                   </a:txBody>
@@ -2876,16 +2849,16 @@
                           <a:solidFill>
                             <a:srgbClr val="111111"/>
                           </a:solidFill>
-                          <a:latin typeface="Poppins Medium" pitchFamily="34" charset="0"/>
-                          <a:ea typeface="Poppins Medium" pitchFamily="34" charset="-122"/>
-                          <a:cs typeface="Poppins Medium" pitchFamily="34" charset="-120"/>
+                          <a:latin typeface="Poppins SemiBold" pitchFamily="34" charset="0"/>
+                          <a:ea typeface="Poppins SemiBold" pitchFamily="34" charset="-122"/>
+                          <a:cs typeface="Poppins SemiBold" pitchFamily="34" charset="-120"/>
                         </a:rPr>
                         <a:t>FIRST STEPS</a:t>
                       </a:r>
                       <a:endParaRPr lang="en-US" sz="900" dirty="0">
-                        <a:latin typeface="Poppins Medium" charset="0"/>
-                        <a:ea typeface="Poppins Medium" charset="0"/>
-                        <a:cs typeface="Poppins Medium" charset="0"/>
+                        <a:latin typeface="Poppins SemiBold" charset="0"/>
+                        <a:ea typeface="Poppins SemiBold" charset="0"/>
+                        <a:cs typeface="Poppins SemiBold" charset="0"/>
                       </a:endParaRPr>
                     </a:p>
                   </a:txBody>
@@ -2931,16 +2904,16 @@
                           <a:solidFill>
                             <a:srgbClr val="111111"/>
                           </a:solidFill>
-                          <a:latin typeface="Poppins Medium" pitchFamily="34" charset="0"/>
-                          <a:ea typeface="Poppins Medium" pitchFamily="34" charset="-122"/>
-                          <a:cs typeface="Poppins Medium" pitchFamily="34" charset="-120"/>
+                          <a:latin typeface="Poppins SemiBold" pitchFamily="34" charset="0"/>
+                          <a:ea typeface="Poppins SemiBold" pitchFamily="34" charset="-122"/>
+                          <a:cs typeface="Poppins SemiBold" pitchFamily="34" charset="-120"/>
                         </a:rPr>
                         <a:t>06  Full press on wholesale</a:t>
                       </a:r>
                       <a:endParaRPr lang="en-US" sz="1100" dirty="0">
-                        <a:latin typeface="Poppins Medium" charset="0"/>
-                        <a:ea typeface="Poppins Medium" charset="0"/>
-                        <a:cs typeface="Poppins Medium" charset="0"/>
+                        <a:latin typeface="Poppins SemiBold" charset="0"/>
+                        <a:ea typeface="Poppins SemiBold" charset="0"/>
+                        <a:cs typeface="Poppins SemiBold" charset="0"/>
                       </a:endParaRPr>
                     </a:p>
                   </a:txBody>
@@ -3133,16 +3106,16 @@
                           <a:solidFill>
                             <a:srgbClr val="111111"/>
                           </a:solidFill>
-                          <a:latin typeface="Poppins Medium" pitchFamily="34" charset="0"/>
-                          <a:ea typeface="Poppins Medium" pitchFamily="34" charset="-122"/>
-                          <a:cs typeface="Poppins Medium" pitchFamily="34" charset="-120"/>
+                          <a:latin typeface="Poppins SemiBold" pitchFamily="34" charset="0"/>
+                          <a:ea typeface="Poppins SemiBold" pitchFamily="34" charset="-122"/>
+                          <a:cs typeface="Poppins SemiBold" pitchFamily="34" charset="-120"/>
                         </a:rPr>
                         <a:t>07  Design for her</a:t>
                       </a:r>
                       <a:endParaRPr lang="en-US" sz="1100" dirty="0">
-                        <a:latin typeface="Poppins Medium" charset="0"/>
-                        <a:ea typeface="Poppins Medium" charset="0"/>
-                        <a:cs typeface="Poppins Medium" charset="0"/>
+                        <a:latin typeface="Poppins SemiBold" charset="0"/>
+                        <a:ea typeface="Poppins SemiBold" charset="0"/>
+                        <a:cs typeface="Poppins SemiBold" charset="0"/>
                       </a:endParaRPr>
                     </a:p>
                   </a:txBody>
@@ -3335,16 +3308,16 @@
                           <a:solidFill>
                             <a:srgbClr val="111111"/>
                           </a:solidFill>
-                          <a:latin typeface="Poppins Medium" pitchFamily="34" charset="0"/>
-                          <a:ea typeface="Poppins Medium" pitchFamily="34" charset="-122"/>
-                          <a:cs typeface="Poppins Medium" pitchFamily="34" charset="-120"/>
+                          <a:latin typeface="Poppins SemiBold" pitchFamily="34" charset="0"/>
+                          <a:ea typeface="Poppins SemiBold" pitchFamily="34" charset="-122"/>
+                          <a:cs typeface="Poppins SemiBold" pitchFamily="34" charset="-120"/>
                         </a:rPr>
                         <a:t>08  Personalise comms and lifetime value</a:t>
                       </a:r>
                       <a:endParaRPr lang="en-US" sz="1100" dirty="0">
-                        <a:latin typeface="Poppins Medium" charset="0"/>
-                        <a:ea typeface="Poppins Medium" charset="0"/>
-                        <a:cs typeface="Poppins Medium" charset="0"/>
+                        <a:latin typeface="Poppins SemiBold" charset="0"/>
+                        <a:ea typeface="Poppins SemiBold" charset="0"/>
+                        <a:cs typeface="Poppins SemiBold" charset="0"/>
                       </a:endParaRPr>
                     </a:p>
                   </a:txBody>
@@ -3537,16 +3510,16 @@
                           <a:solidFill>
                             <a:srgbClr val="111111"/>
                           </a:solidFill>
-                          <a:latin typeface="Poppins Medium" pitchFamily="34" charset="0"/>
-                          <a:ea typeface="Poppins Medium" pitchFamily="34" charset="-122"/>
-                          <a:cs typeface="Poppins Medium" pitchFamily="34" charset="-120"/>
+                          <a:latin typeface="Poppins SemiBold" pitchFamily="34" charset="0"/>
+                          <a:ea typeface="Poppins SemiBold" pitchFamily="34" charset="-122"/>
+                          <a:cs typeface="Poppins SemiBold" pitchFamily="34" charset="-120"/>
                         </a:rPr>
                         <a:t>09  Make the kegerator worth writing about</a:t>
                       </a:r>
                       <a:endParaRPr lang="en-US" sz="1100" dirty="0">
-                        <a:latin typeface="Poppins Medium" charset="0"/>
-                        <a:ea typeface="Poppins Medium" charset="0"/>
-                        <a:cs typeface="Poppins Medium" charset="0"/>
+                        <a:latin typeface="Poppins SemiBold" charset="0"/>
+                        <a:ea typeface="Poppins SemiBold" charset="0"/>
+                        <a:cs typeface="Poppins SemiBold" charset="0"/>
                       </a:endParaRPr>
                     </a:p>
                   </a:txBody>
@@ -3739,16 +3712,16 @@
                           <a:solidFill>
                             <a:srgbClr val="111111"/>
                           </a:solidFill>
-                          <a:latin typeface="Poppins Medium" pitchFamily="34" charset="0"/>
-                          <a:ea typeface="Poppins Medium" pitchFamily="34" charset="-122"/>
-                          <a:cs typeface="Poppins Medium" pitchFamily="34" charset="-120"/>
+                          <a:latin typeface="Poppins SemiBold" pitchFamily="34" charset="0"/>
+                          <a:ea typeface="Poppins SemiBold" pitchFamily="34" charset="-122"/>
+                          <a:cs typeface="Poppins SemiBold" pitchFamily="34" charset="-120"/>
                         </a:rPr>
                         <a:t>10  Package around the duopoly</a:t>
                       </a:r>
                       <a:endParaRPr lang="en-US" sz="1100" dirty="0">
-                        <a:latin typeface="Poppins Medium" charset="0"/>
-                        <a:ea typeface="Poppins Medium" charset="0"/>
-                        <a:cs typeface="Poppins Medium" charset="0"/>
+                        <a:latin typeface="Poppins SemiBold" charset="0"/>
+                        <a:ea typeface="Poppins SemiBold" charset="0"/>
+                        <a:cs typeface="Poppins SemiBold" charset="0"/>
                       </a:endParaRPr>
                     </a:p>
                   </a:txBody>
@@ -4013,9 +3986,9 @@
                 <a:solidFill>
                   <a:srgbClr val="FAF8F4"/>
                 </a:solidFill>
-                <a:latin typeface="Poppins Light" pitchFamily="34" charset="0"/>
-                <a:ea typeface="Poppins Light" pitchFamily="34" charset="-122"/>
-                <a:cs typeface="Poppins Light" pitchFamily="34" charset="-120"/>
+                <a:latin typeface="Poppins SemiBold" pitchFamily="34" charset="0"/>
+                <a:ea typeface="Poppins SemiBold" pitchFamily="34" charset="-122"/>
+                <a:cs typeface="Poppins SemiBold" pitchFamily="34" charset="-120"/>
               </a:rPr>
               <a:t>PART 03</a:t>
             </a:r>
@@ -4031,7 +4004,7 @@
         </p:nvSpPr>
         <p:spPr>
           <a:xfrm>
-            <a:off x="822960" y="2286000"/>
+            <a:off x="914400" y="2286000"/>
             <a:ext cx="10362895" cy="1737360"/>
           </a:xfrm>
           <a:prstGeom prst="rect">
@@ -4052,9 +4025,9 @@
                 <a:solidFill>
                   <a:srgbClr val="FAF8F4"/>
                 </a:solidFill>
-                <a:latin typeface="Poppins Light" pitchFamily="34" charset="0"/>
-                <a:ea typeface="Poppins Light" pitchFamily="34" charset="-122"/>
-                <a:cs typeface="Poppins Light" pitchFamily="34" charset="-120"/>
+                <a:latin typeface="Poppins SemiBold" pitchFamily="34" charset="0"/>
+                <a:ea typeface="Poppins SemiBold" pitchFamily="34" charset="-122"/>
+                <a:cs typeface="Poppins SemiBold" pitchFamily="34" charset="-120"/>
               </a:rPr>
               <a:t>Collateral.</a:t>
             </a:r>
@@ -4091,9 +4064,9 @@
                 <a:solidFill>
                   <a:srgbClr val="FAF8F4"/>
                 </a:solidFill>
-                <a:latin typeface="Poppins Light" pitchFamily="34" charset="0"/>
-                <a:ea typeface="Poppins Light" pitchFamily="34" charset="-122"/>
-                <a:cs typeface="Poppins Light" pitchFamily="34" charset="-120"/>
+                <a:latin typeface="Poppins SemiBold" pitchFamily="34" charset="0"/>
+                <a:ea typeface="Poppins SemiBold" pitchFamily="34" charset="-122"/>
+                <a:cs typeface="Poppins SemiBold" pitchFamily="34" charset="-120"/>
               </a:rPr>
               <a:t>What the destination business looks like on paper.</a:t>
             </a:r>
@@ -4162,9 +4135,9 @@
                 <a:solidFill>
                   <a:srgbClr val="111111"/>
                 </a:solidFill>
-                <a:latin typeface="Poppins Medium" pitchFamily="34" charset="0"/>
-                <a:ea typeface="Poppins Medium" pitchFamily="34" charset="-122"/>
-                <a:cs typeface="Poppins Medium" pitchFamily="34" charset="-120"/>
+                <a:latin typeface="Poppins SemiBold" pitchFamily="34" charset="0"/>
+                <a:ea typeface="Poppins SemiBold" pitchFamily="34" charset="-122"/>
+                <a:cs typeface="Poppins SemiBold" pitchFamily="34" charset="-120"/>
               </a:rPr>
               <a:t>PART 03 · COLLATERAL</a:t>
             </a:r>
@@ -4204,9 +4177,9 @@
                 <a:solidFill>
                   <a:srgbClr val="111111"/>
                 </a:solidFill>
-                <a:latin typeface="Poppins Medium" pitchFamily="34" charset="0"/>
-                <a:ea typeface="Poppins Medium" pitchFamily="34" charset="-122"/>
-                <a:cs typeface="Poppins Medium" pitchFamily="34" charset="-120"/>
+                <a:latin typeface="Poppins SemiBold" pitchFamily="34" charset="0"/>
+                <a:ea typeface="Poppins SemiBold" pitchFamily="34" charset="-122"/>
+                <a:cs typeface="Poppins SemiBold" pitchFamily="34" charset="-120"/>
               </a:rPr>
               <a:t>The destination business, sold the way the venue already sells it.</a:t>
             </a:r>
@@ -4309,9 +4282,9 @@
                 <a:solidFill>
                   <a:srgbClr val="111111"/>
                 </a:solidFill>
-                <a:latin typeface="Poppins Medium" pitchFamily="34" charset="0"/>
-                <a:ea typeface="Poppins Medium" pitchFamily="34" charset="-122"/>
-                <a:cs typeface="Poppins Medium" pitchFamily="34" charset="-120"/>
+                <a:latin typeface="Poppins SemiBold" pitchFamily="34" charset="0"/>
+                <a:ea typeface="Poppins SemiBold" pitchFamily="34" charset="-122"/>
+                <a:cs typeface="Poppins SemiBold" pitchFamily="34" charset="-120"/>
               </a:rPr>
               <a:t>Weddings</a:t>
             </a:r>
@@ -4372,9 +4345,9 @@
                 <a:solidFill>
                   <a:srgbClr val="111111"/>
                 </a:solidFill>
-                <a:latin typeface="Poppins Medium" pitchFamily="34" charset="0"/>
-                <a:ea typeface="Poppins Medium" pitchFamily="34" charset="-122"/>
-                <a:cs typeface="Poppins Medium" pitchFamily="34" charset="-120"/>
+                <a:latin typeface="Poppins SemiBold" pitchFamily="34" charset="0"/>
+                <a:ea typeface="Poppins SemiBold" pitchFamily="34" charset="-122"/>
+                <a:cs typeface="Poppins SemiBold" pitchFamily="34" charset="-120"/>
               </a:rPr>
               <a:t>Bucks and hens</a:t>
             </a:r>
@@ -4435,9 +4408,9 @@
                 <a:solidFill>
                   <a:srgbClr val="111111"/>
                 </a:solidFill>
-                <a:latin typeface="Poppins Medium" pitchFamily="34" charset="0"/>
-                <a:ea typeface="Poppins Medium" pitchFamily="34" charset="-122"/>
-                <a:cs typeface="Poppins Medium" pitchFamily="34" charset="-120"/>
+                <a:latin typeface="Poppins SemiBold" pitchFamily="34" charset="0"/>
+                <a:ea typeface="Poppins SemiBold" pitchFamily="34" charset="-122"/>
+                <a:cs typeface="Poppins SemiBold" pitchFamily="34" charset="-120"/>
               </a:rPr>
               <a:t>Work functions</a:t>
             </a:r>
@@ -4498,9 +4471,9 @@
                 <a:solidFill>
                   <a:srgbClr val="111111"/>
                 </a:solidFill>
-                <a:latin typeface="Poppins Medium" pitchFamily="34" charset="0"/>
-                <a:ea typeface="Poppins Medium" pitchFamily="34" charset="-122"/>
-                <a:cs typeface="Poppins Medium" pitchFamily="34" charset="-120"/>
+                <a:latin typeface="Poppins SemiBold" pitchFamily="34" charset="0"/>
+                <a:ea typeface="Poppins SemiBold" pitchFamily="34" charset="-122"/>
+                <a:cs typeface="Poppins SemiBold" pitchFamily="34" charset="-120"/>
               </a:rPr>
               <a:t>Tours and tastings</a:t>
             </a:r>
@@ -4569,9 +4542,9 @@
                 <a:solidFill>
                   <a:srgbClr val="111111"/>
                 </a:solidFill>
-                <a:latin typeface="Poppins Medium" pitchFamily="34" charset="0"/>
-                <a:ea typeface="Poppins Medium" pitchFamily="34" charset="-122"/>
-                <a:cs typeface="Poppins Medium" pitchFamily="34" charset="-120"/>
+                <a:latin typeface="Poppins SemiBold" pitchFamily="34" charset="0"/>
+                <a:ea typeface="Poppins SemiBold" pitchFamily="34" charset="-122"/>
+                <a:cs typeface="Poppins SemiBold" pitchFamily="34" charset="-120"/>
               </a:rPr>
               <a:t>PART 03 · COLLATERAL</a:t>
             </a:r>
@@ -4611,9 +4584,9 @@
                 <a:solidFill>
                   <a:srgbClr val="111111"/>
                 </a:solidFill>
-                <a:latin typeface="Poppins Medium" pitchFamily="34" charset="0"/>
-                <a:ea typeface="Poppins Medium" pitchFamily="34" charset="-122"/>
-                <a:cs typeface="Poppins Medium" pitchFamily="34" charset="-120"/>
+                <a:latin typeface="Poppins SemiBold" pitchFamily="34" charset="0"/>
+                <a:ea typeface="Poppins SemiBold" pitchFamily="34" charset="-122"/>
+                <a:cs typeface="Poppins SemiBold" pitchFamily="34" charset="-120"/>
               </a:rPr>
               <a:t>Turning hens and bucks days into wedding day volume.</a:t>
             </a:r>
@@ -4674,9 +4647,9 @@
                 <a:solidFill>
                   <a:srgbClr val="111111"/>
                 </a:solidFill>
-                <a:latin typeface="Poppins Medium" pitchFamily="34" charset="0"/>
-                <a:ea typeface="Poppins Medium" pitchFamily="34" charset="-122"/>
-                <a:cs typeface="Poppins Medium" pitchFamily="34" charset="-120"/>
+                <a:latin typeface="Poppins SemiBold" pitchFamily="34" charset="0"/>
+                <a:ea typeface="Poppins SemiBold" pitchFamily="34" charset="-122"/>
+                <a:cs typeface="Poppins SemiBold" pitchFamily="34" charset="-120"/>
               </a:rPr>
               <a:t>The artwork, ready to send</a:t>
             </a:r>
@@ -4736,9 +4709,9 @@
                 <a:solidFill>
                   <a:srgbClr val="666666"/>
                 </a:solidFill>
-                <a:latin typeface="Poppins Light" pitchFamily="34" charset="0"/>
-                <a:ea typeface="Poppins Light" pitchFamily="34" charset="-122"/>
-                <a:cs typeface="Poppins Light" pitchFamily="34" charset="-120"/>
+                <a:latin typeface="Poppins SemiBold" pitchFamily="34" charset="0"/>
+                <a:ea typeface="Poppins SemiBold" pitchFamily="34" charset="-122"/>
+                <a:cs typeface="Poppins SemiBold" pitchFamily="34" charset="-120"/>
               </a:rPr>
               <a:t>01</a:t>
             </a:r>
@@ -4775,9 +4748,9 @@
                 <a:solidFill>
                   <a:srgbClr val="111111"/>
                 </a:solidFill>
-                <a:latin typeface="Poppins Medium" pitchFamily="34" charset="0"/>
-                <a:ea typeface="Poppins Medium" pitchFamily="34" charset="-122"/>
-                <a:cs typeface="Poppins Medium" pitchFamily="34" charset="-120"/>
+                <a:latin typeface="Poppins SemiBold" pitchFamily="34" charset="0"/>
+                <a:ea typeface="Poppins SemiBold" pitchFamily="34" charset="-122"/>
+                <a:cs typeface="Poppins SemiBold" pitchFamily="34" charset="-120"/>
               </a:rPr>
               <a:t>The Tap Room event</a:t>
             </a:r>
@@ -4879,9 +4852,9 @@
                 <a:solidFill>
                   <a:srgbClr val="666666"/>
                 </a:solidFill>
-                <a:latin typeface="Poppins Light" pitchFamily="34" charset="0"/>
-                <a:ea typeface="Poppins Light" pitchFamily="34" charset="-122"/>
-                <a:cs typeface="Poppins Light" pitchFamily="34" charset="-120"/>
+                <a:latin typeface="Poppins SemiBold" pitchFamily="34" charset="0"/>
+                <a:ea typeface="Poppins SemiBold" pitchFamily="34" charset="-122"/>
+                <a:cs typeface="Poppins SemiBold" pitchFamily="34" charset="-120"/>
               </a:rPr>
               <a:t>02</a:t>
             </a:r>
@@ -4918,9 +4891,9 @@
                 <a:solidFill>
                   <a:srgbClr val="111111"/>
                 </a:solidFill>
-                <a:latin typeface="Poppins Medium" pitchFamily="34" charset="0"/>
-                <a:ea typeface="Poppins Medium" pitchFamily="34" charset="-122"/>
-                <a:cs typeface="Poppins Medium" pitchFamily="34" charset="-120"/>
+                <a:latin typeface="Poppins SemiBold" pitchFamily="34" charset="0"/>
+                <a:ea typeface="Poppins SemiBold" pitchFamily="34" charset="-122"/>
+                <a:cs typeface="Poppins SemiBold" pitchFamily="34" charset="-120"/>
               </a:rPr>
               <a:t>Bespoke branding</a:t>
             </a:r>
@@ -5022,9 +4995,9 @@
                 <a:solidFill>
                   <a:srgbClr val="666666"/>
                 </a:solidFill>
-                <a:latin typeface="Poppins Light" pitchFamily="34" charset="0"/>
-                <a:ea typeface="Poppins Light" pitchFamily="34" charset="-122"/>
-                <a:cs typeface="Poppins Light" pitchFamily="34" charset="-120"/>
+                <a:latin typeface="Poppins SemiBold" pitchFamily="34" charset="0"/>
+                <a:ea typeface="Poppins SemiBold" pitchFamily="34" charset="-122"/>
+                <a:cs typeface="Poppins SemiBold" pitchFamily="34" charset="-120"/>
               </a:rPr>
               <a:t>03</a:t>
             </a:r>
@@ -5061,9 +5034,9 @@
                 <a:solidFill>
                   <a:srgbClr val="111111"/>
                 </a:solidFill>
-                <a:latin typeface="Poppins Medium" pitchFamily="34" charset="0"/>
-                <a:ea typeface="Poppins Medium" pitchFamily="34" charset="-122"/>
-                <a:cs typeface="Poppins Medium" pitchFamily="34" charset="-120"/>
+                <a:latin typeface="Poppins SemiBold" pitchFamily="34" charset="0"/>
+                <a:ea typeface="Poppins SemiBold" pitchFamily="34" charset="-122"/>
+                <a:cs typeface="Poppins SemiBold" pitchFamily="34" charset="-120"/>
               </a:rPr>
               <a:t>Wedding day reception</a:t>
             </a:r>
@@ -5165,9 +5138,9 @@
                 <a:solidFill>
                   <a:srgbClr val="666666"/>
                 </a:solidFill>
-                <a:latin typeface="Poppins Light" pitchFamily="34" charset="0"/>
-                <a:ea typeface="Poppins Light" pitchFamily="34" charset="-122"/>
-                <a:cs typeface="Poppins Light" pitchFamily="34" charset="-120"/>
+                <a:latin typeface="Poppins SemiBold" pitchFamily="34" charset="0"/>
+                <a:ea typeface="Poppins SemiBold" pitchFamily="34" charset="-122"/>
+                <a:cs typeface="Poppins SemiBold" pitchFamily="34" charset="-120"/>
               </a:rPr>
               <a:t>04</a:t>
             </a:r>
@@ -5204,9 +5177,9 @@
                 <a:solidFill>
                   <a:srgbClr val="111111"/>
                 </a:solidFill>
-                <a:latin typeface="Poppins Medium" pitchFamily="34" charset="0"/>
-                <a:ea typeface="Poppins Medium" pitchFamily="34" charset="-122"/>
-                <a:cs typeface="Poppins Medium" pitchFamily="34" charset="-120"/>
+                <a:latin typeface="Poppins SemiBold" pitchFamily="34" charset="0"/>
+                <a:ea typeface="Poppins SemiBold" pitchFamily="34" charset="-122"/>
+                <a:cs typeface="Poppins SemiBold" pitchFamily="34" charset="-120"/>
               </a:rPr>
               <a:t>Take-home compound</a:t>
             </a:r>
@@ -5308,9 +5281,9 @@
                 <a:solidFill>
                   <a:srgbClr val="111111"/>
                 </a:solidFill>
-                <a:latin typeface="Poppins Medium" pitchFamily="34" charset="0"/>
-                <a:ea typeface="Poppins Medium" pitchFamily="34" charset="-122"/>
-                <a:cs typeface="Poppins Medium" pitchFamily="34" charset="-120"/>
+                <a:latin typeface="Poppins SemiBold" pitchFamily="34" charset="0"/>
+                <a:ea typeface="Poppins SemiBold" pitchFamily="34" charset="-122"/>
+                <a:cs typeface="Poppins SemiBold" pitchFamily="34" charset="-120"/>
               </a:rPr>
               <a:t>THE COMPOUND EFFECT</a:t>
             </a:r>
@@ -5421,9 +5394,9 @@
                 <a:solidFill>
                   <a:srgbClr val="111111"/>
                 </a:solidFill>
-                <a:latin typeface="Poppins Medium" pitchFamily="34" charset="0"/>
-                <a:ea typeface="Poppins Medium" pitchFamily="34" charset="-122"/>
-                <a:cs typeface="Poppins Medium" pitchFamily="34" charset="-120"/>
+                <a:latin typeface="Poppins SemiBold" pitchFamily="34" charset="0"/>
+                <a:ea typeface="Poppins SemiBold" pitchFamily="34" charset="-122"/>
+                <a:cs typeface="Poppins SemiBold" pitchFamily="34" charset="-120"/>
               </a:rPr>
               <a:t>PART 03 · COLLATERAL</a:t>
             </a:r>
@@ -5463,61 +5436,19 @@
                 <a:solidFill>
                   <a:srgbClr val="111111"/>
                 </a:solidFill>
-                <a:latin typeface="Poppins Medium" pitchFamily="34" charset="0"/>
-                <a:ea typeface="Poppins Medium" pitchFamily="34" charset="-122"/>
-                <a:cs typeface="Poppins Medium" pitchFamily="34" charset="-120"/>
+                <a:latin typeface="Poppins SemiBold" pitchFamily="34" charset="0"/>
+                <a:ea typeface="Poppins SemiBold" pitchFamily="34" charset="-122"/>
+                <a:cs typeface="Poppins SemiBold" pitchFamily="34" charset="-120"/>
               </a:rPr>
               <a:t>What a co-branded system could look like.</a:t>
             </a:r>
             <a:endParaRPr lang="en-US" sz="4200" dirty="0"/>
-          </a:p>
-        </p:txBody>
-      </p:sp>
-      <p:sp>
-        <p:nvSpPr>
-          <p:cNvPr id="4" name="Text 2"/>
-          <p:cNvSpPr txBox="1"/>
-          <p:nvPr/>
-        </p:nvSpPr>
-        <p:spPr>
-          <a:xfrm>
-            <a:off x="914400" y="6144768"/>
-            <a:ext cx="10362895" cy="457200"/>
-          </a:xfrm>
-          <a:prstGeom prst="rect">
-            <a:avLst/>
-          </a:prstGeom>
-          <a:noFill/>
-          <a:ln/>
-        </p:spPr>
-        <p:txBody>
-          <a:bodyPr wrap="square" lIns="0" tIns="0" rIns="0" bIns="0" rtlCol="0" anchor="ctr"/>
-          <a:lstStyle/>
-          <a:p>
-            <a:pPr indent="0" marL="0">
-              <a:lnSpc>
-                <a:spcPct val="130000"/>
-              </a:lnSpc>
-              <a:buNone/>
-            </a:pPr>
-            <a:r>
-              <a:rPr lang="en-US" sz="1100" dirty="0">
-                <a:solidFill>
-                  <a:srgbClr val="666666"/>
-                </a:solidFill>
-                <a:latin typeface="Poppins" pitchFamily="34" charset="0"/>
-                <a:ea typeface="Poppins" pitchFamily="34" charset="-122"/>
-                <a:cs typeface="Poppins" pitchFamily="34" charset="-120"/>
-              </a:rPr>
-              <a:t>Concept renders for discussion. No approach has been made to any brand shown, and none of these marks are licensed. Worth showing for the reaction. Not for anything that leaves the room.</a:t>
-            </a:r>
-            <a:endParaRPr lang="en-US" sz="1100" dirty="0"/>
           </a:p>
         </p:txBody>
       </p:sp>
       <p:pic>
         <p:nvPicPr>
-          <p:cNvPr id="5" name="Image 0" descr="/home/user/tapthatbrewery/00 Admin/06 Presentations/pivot/build-jp/jp-dewalt-collab.jpg">    </p:cNvPr>
+          <p:cNvPr id="4" name="Image 0" descr="/home/user/tapthatbrewery/00 Admin/06 Presentations/pivot/build-jp/jp-dewalt-collab.jpg">    </p:cNvPr>
           <p:cNvPicPr>
             <a:picLocks noChangeAspect="1"/>
           </p:cNvPicPr>
@@ -5531,7 +5462,7 @@
         <p:spPr>
           <a:xfrm>
             <a:off x="914400" y="2377440"/>
-            <a:ext cx="4952848" cy="1453896"/>
+            <a:ext cx="2834640" cy="1594485"/>
           </a:xfrm>
           <a:prstGeom prst="rect">
             <a:avLst/>
@@ -5540,14 +5471,14 @@
       </p:pic>
       <p:sp>
         <p:nvSpPr>
-          <p:cNvPr id="6" name="Text 3"/>
-          <p:cNvSpPr txBox="1"/>
-          <p:nvPr/>
-        </p:nvSpPr>
-        <p:spPr>
-          <a:xfrm>
-            <a:off x="914400" y="3886200"/>
-            <a:ext cx="4952848" cy="237744"/>
+          <p:cNvPr id="5" name="Text 2"/>
+          <p:cNvSpPr txBox="1"/>
+          <p:nvPr/>
+        </p:nvSpPr>
+        <p:spPr>
+          <a:xfrm>
+            <a:off x="914400" y="4063365"/>
+            <a:ext cx="2834640" cy="237744"/>
           </a:xfrm>
           <a:prstGeom prst="rect">
             <a:avLst/>
@@ -5567,9 +5498,9 @@
                 <a:solidFill>
                   <a:srgbClr val="111111"/>
                 </a:solidFill>
-                <a:latin typeface="Poppins Medium" pitchFamily="34" charset="0"/>
-                <a:ea typeface="Poppins Medium" pitchFamily="34" charset="-122"/>
-                <a:cs typeface="Poppins Medium" pitchFamily="34" charset="-120"/>
+                <a:latin typeface="Poppins SemiBold" pitchFamily="34" charset="0"/>
+                <a:ea typeface="Poppins SemiBold" pitchFamily="34" charset="-122"/>
+                <a:cs typeface="Poppins SemiBold" pitchFamily="34" charset="-120"/>
               </a:rPr>
               <a:t>Trade and worksite</a:t>
             </a:r>
@@ -5579,7 +5510,7 @@
       </p:sp>
       <p:pic>
         <p:nvPicPr>
-          <p:cNvPr id="7" name="Image 1" descr="/home/user/tapthatbrewery/00 Admin/06 Presentations/pivot/build-jp/jp-raptor-collab.jpg">    </p:cNvPr>
+          <p:cNvPr id="6" name="Image 1" descr="/home/user/tapthatbrewery/00 Admin/06 Presentations/pivot/build-jp/jp-raptor-collab.jpg">    </p:cNvPr>
           <p:cNvPicPr>
             <a:picLocks noChangeAspect="1"/>
           </p:cNvPicPr>
@@ -5592,8 +5523,8 @@
         </p:blipFill>
         <p:spPr>
           <a:xfrm>
-            <a:off x="6324448" y="2377440"/>
-            <a:ext cx="4952848" cy="1453896"/>
+            <a:off x="3986784" y="2377440"/>
+            <a:ext cx="2834640" cy="1594485"/>
           </a:xfrm>
           <a:prstGeom prst="rect">
             <a:avLst/>
@@ -5602,14 +5533,14 @@
       </p:pic>
       <p:sp>
         <p:nvSpPr>
-          <p:cNvPr id="8" name="Text 4"/>
-          <p:cNvSpPr txBox="1"/>
-          <p:nvPr/>
-        </p:nvSpPr>
-        <p:spPr>
-          <a:xfrm>
-            <a:off x="6324448" y="3886200"/>
-            <a:ext cx="4952848" cy="237744"/>
+          <p:cNvPr id="7" name="Text 3"/>
+          <p:cNvSpPr txBox="1"/>
+          <p:nvPr/>
+        </p:nvSpPr>
+        <p:spPr>
+          <a:xfrm>
+            <a:off x="3986784" y="4063365"/>
+            <a:ext cx="2834640" cy="237744"/>
           </a:xfrm>
           <a:prstGeom prst="rect">
             <a:avLst/>
@@ -5629,9 +5560,9 @@
                 <a:solidFill>
                   <a:srgbClr val="111111"/>
                 </a:solidFill>
-                <a:latin typeface="Poppins Medium" pitchFamily="34" charset="0"/>
-                <a:ea typeface="Poppins Medium" pitchFamily="34" charset="-122"/>
-                <a:cs typeface="Poppins Medium" pitchFamily="34" charset="-120"/>
+                <a:latin typeface="Poppins SemiBold" pitchFamily="34" charset="0"/>
+                <a:ea typeface="Poppins SemiBold" pitchFamily="34" charset="-122"/>
+                <a:cs typeface="Poppins SemiBold" pitchFamily="34" charset="-120"/>
               </a:rPr>
               <a:t>Four-wheel drive and touring</a:t>
             </a:r>
@@ -5641,7 +5572,7 @@
       </p:sp>
       <p:pic>
         <p:nvPicPr>
-          <p:cNvPr id="9" name="Image 2" descr="/home/user/tapthatbrewery/00 Admin/06 Presentations/pivot/build-jp/jp-harley-collab.jpg">    </p:cNvPr>
+          <p:cNvPr id="8" name="Image 2" descr="/home/user/tapthatbrewery/00 Admin/06 Presentations/pivot/build-jp/jp-harley-collab.jpg">    </p:cNvPr>
           <p:cNvPicPr>
             <a:picLocks noChangeAspect="1"/>
           </p:cNvPicPr>
@@ -5654,8 +5585,8 @@
         </p:blipFill>
         <p:spPr>
           <a:xfrm>
-            <a:off x="914400" y="4251960"/>
-            <a:ext cx="4952848" cy="1453896"/>
+            <a:off x="914400" y="4474845"/>
+            <a:ext cx="2834640" cy="1594485"/>
           </a:xfrm>
           <a:prstGeom prst="rect">
             <a:avLst/>
@@ -5664,14 +5595,14 @@
       </p:pic>
       <p:sp>
         <p:nvSpPr>
-          <p:cNvPr id="10" name="Text 5"/>
-          <p:cNvSpPr txBox="1"/>
-          <p:nvPr/>
-        </p:nvSpPr>
-        <p:spPr>
-          <a:xfrm>
-            <a:off x="914400" y="5760720"/>
-            <a:ext cx="4952848" cy="237744"/>
+          <p:cNvPr id="9" name="Text 4"/>
+          <p:cNvSpPr txBox="1"/>
+          <p:nvPr/>
+        </p:nvSpPr>
+        <p:spPr>
+          <a:xfrm>
+            <a:off x="914400" y="6160770"/>
+            <a:ext cx="2834640" cy="237744"/>
           </a:xfrm>
           <a:prstGeom prst="rect">
             <a:avLst/>
@@ -5691,9 +5622,9 @@
                 <a:solidFill>
                   <a:srgbClr val="111111"/>
                 </a:solidFill>
-                <a:latin typeface="Poppins Medium" pitchFamily="34" charset="0"/>
-                <a:ea typeface="Poppins Medium" pitchFamily="34" charset="-122"/>
-                <a:cs typeface="Poppins Medium" pitchFamily="34" charset="-120"/>
+                <a:latin typeface="Poppins SemiBold" pitchFamily="34" charset="0"/>
+                <a:ea typeface="Poppins SemiBold" pitchFamily="34" charset="-122"/>
+                <a:cs typeface="Poppins SemiBold" pitchFamily="34" charset="-120"/>
               </a:rPr>
               <a:t>Motorcycle clubs</a:t>
             </a:r>
@@ -5703,7 +5634,7 @@
       </p:sp>
       <p:pic>
         <p:nvPicPr>
-          <p:cNvPr id="11" name="Image 3" descr="/home/user/tapthatbrewery/00 Admin/06 Presentations/pivot/build-jp/jp-tap-truck.jpg">    </p:cNvPr>
+          <p:cNvPr id="10" name="Image 3" descr="/home/user/tapthatbrewery/00 Admin/06 Presentations/pivot/build-jp/jp-tap-truck.jpg">    </p:cNvPr>
           <p:cNvPicPr>
             <a:picLocks noChangeAspect="1"/>
           </p:cNvPicPr>
@@ -5716,8 +5647,8 @@
         </p:blipFill>
         <p:spPr>
           <a:xfrm>
-            <a:off x="6324448" y="4251960"/>
-            <a:ext cx="4952848" cy="1453896"/>
+            <a:off x="3986784" y="4474845"/>
+            <a:ext cx="2834640" cy="1594485"/>
           </a:xfrm>
           <a:prstGeom prst="rect">
             <a:avLst/>
@@ -5726,14 +5657,14 @@
       </p:pic>
       <p:sp>
         <p:nvSpPr>
-          <p:cNvPr id="12" name="Text 6"/>
-          <p:cNvSpPr txBox="1"/>
-          <p:nvPr/>
-        </p:nvSpPr>
-        <p:spPr>
-          <a:xfrm>
-            <a:off x="6324448" y="5760720"/>
-            <a:ext cx="4952848" cy="237744"/>
+          <p:cNvPr id="11" name="Text 5"/>
+          <p:cNvSpPr txBox="1"/>
+          <p:nvPr/>
+        </p:nvSpPr>
+        <p:spPr>
+          <a:xfrm>
+            <a:off x="3986784" y="6160770"/>
+            <a:ext cx="2834640" cy="237744"/>
           </a:xfrm>
           <a:prstGeom prst="rect">
             <a:avLst/>
@@ -5753,13 +5684,78 @@
                 <a:solidFill>
                   <a:srgbClr val="111111"/>
                 </a:solidFill>
-                <a:latin typeface="Poppins Medium" pitchFamily="34" charset="0"/>
-                <a:ea typeface="Poppins Medium" pitchFamily="34" charset="-122"/>
-                <a:cs typeface="Poppins Medium" pitchFamily="34" charset="-120"/>
+                <a:latin typeface="Poppins SemiBold" pitchFamily="34" charset="0"/>
+                <a:ea typeface="Poppins SemiBold" pitchFamily="34" charset="-122"/>
+                <a:cs typeface="Poppins SemiBold" pitchFamily="34" charset="-120"/>
               </a:rPr>
               <a:t>Mobile bar for events</a:t>
             </a:r>
             <a:endParaRPr lang="en-US" sz="1000" dirty="0"/>
+          </a:p>
+        </p:txBody>
+      </p:sp>
+      <p:sp>
+        <p:nvSpPr>
+          <p:cNvPr id="12" name="Shape 6"/>
+          <p:cNvSpPr/>
+          <p:nvPr/>
+        </p:nvSpPr>
+        <p:spPr>
+          <a:xfrm>
+            <a:off x="7552944" y="2377440"/>
+            <a:ext cx="3724351" cy="0"/>
+          </a:xfrm>
+          <a:prstGeom prst="line">
+            <a:avLst/>
+          </a:prstGeom>
+          <a:noFill/>
+          <a:ln w="9525">
+            <a:solidFill>
+              <a:srgbClr val="D8D4CF"/>
+            </a:solidFill>
+            <a:prstDash val="solid"/>
+          </a:ln>
+        </p:spPr>
+      </p:sp>
+      <p:sp>
+        <p:nvSpPr>
+          <p:cNvPr id="13" name="Text 7"/>
+          <p:cNvSpPr txBox="1"/>
+          <p:nvPr/>
+        </p:nvSpPr>
+        <p:spPr>
+          <a:xfrm>
+            <a:off x="7552944" y="2505456"/>
+            <a:ext cx="3724351" cy="2926080"/>
+          </a:xfrm>
+          <a:prstGeom prst="rect">
+            <a:avLst/>
+          </a:prstGeom>
+          <a:noFill/>
+          <a:ln/>
+        </p:spPr>
+        <p:txBody>
+          <a:bodyPr wrap="square" lIns="0" tIns="0" rIns="0" bIns="0" rtlCol="0" anchor="ctr"/>
+          <a:lstStyle/>
+          <a:p>
+            <a:pPr indent="0" marL="0">
+              <a:lnSpc>
+                <a:spcPct val="140000"/>
+              </a:lnSpc>
+              <a:buNone/>
+            </a:pPr>
+            <a:r>
+              <a:rPr lang="en-US" sz="1300" dirty="0">
+                <a:solidFill>
+                  <a:srgbClr val="111111"/>
+                </a:solidFill>
+                <a:latin typeface="Poppins" pitchFamily="34" charset="0"/>
+                <a:ea typeface="Poppins" pitchFamily="34" charset="-122"/>
+                <a:cs typeface="Poppins" pitchFamily="34" charset="-120"/>
+              </a:rPr>
+              <a:t>Concept renders for discussion. No approach has been made to any brand shown, and none of these marks are licensed. Worth showing for the reaction. Not for anything that leaves the room.</a:t>
+            </a:r>
+            <a:endParaRPr lang="en-US" sz="1300" dirty="0"/>
           </a:p>
         </p:txBody>
       </p:sp>
@@ -5848,9 +5844,9 @@
                 <a:solidFill>
                   <a:srgbClr val="FAF8F4"/>
                 </a:solidFill>
-                <a:latin typeface="Poppins Light" pitchFamily="34" charset="0"/>
-                <a:ea typeface="Poppins Light" pitchFamily="34" charset="-122"/>
-                <a:cs typeface="Poppins Light" pitchFamily="34" charset="-120"/>
+                <a:latin typeface="Poppins SemiBold" pitchFamily="34" charset="0"/>
+                <a:ea typeface="Poppins SemiBold" pitchFamily="34" charset="-122"/>
+                <a:cs typeface="Poppins SemiBold" pitchFamily="34" charset="-120"/>
               </a:rPr>
               <a:t>PART 04</a:t>
             </a:r>
@@ -5866,7 +5862,7 @@
         </p:nvSpPr>
         <p:spPr>
           <a:xfrm>
-            <a:off x="822960" y="2286000"/>
+            <a:off x="914400" y="2286000"/>
             <a:ext cx="10362895" cy="1737360"/>
           </a:xfrm>
           <a:prstGeom prst="rect">
@@ -5887,9 +5883,9 @@
                 <a:solidFill>
                   <a:srgbClr val="FAF8F4"/>
                 </a:solidFill>
-                <a:latin typeface="Poppins Light" pitchFamily="34" charset="0"/>
-                <a:ea typeface="Poppins Light" pitchFamily="34" charset="-122"/>
-                <a:cs typeface="Poppins Light" pitchFamily="34" charset="-120"/>
+                <a:latin typeface="Poppins SemiBold" pitchFamily="34" charset="0"/>
+                <a:ea typeface="Poppins SemiBold" pitchFamily="34" charset="-122"/>
+                <a:cs typeface="Poppins SemiBold" pitchFamily="34" charset="-120"/>
               </a:rPr>
               <a:t>Execution.</a:t>
             </a:r>
@@ -5926,9 +5922,9 @@
                 <a:solidFill>
                   <a:srgbClr val="FAF8F4"/>
                 </a:solidFill>
-                <a:latin typeface="Poppins Light" pitchFamily="34" charset="0"/>
-                <a:ea typeface="Poppins Light" pitchFamily="34" charset="-122"/>
-                <a:cs typeface="Poppins Light" pitchFamily="34" charset="-120"/>
+                <a:latin typeface="Poppins SemiBold" pitchFamily="34" charset="0"/>
+                <a:ea typeface="Poppins SemiBold" pitchFamily="34" charset="-122"/>
+                <a:cs typeface="Poppins SemiBold" pitchFamily="34" charset="-120"/>
               </a:rPr>
               <a:t>The small fixes, and where we can help.</a:t>
             </a:r>
@@ -5997,9 +5993,9 @@
                 <a:solidFill>
                   <a:srgbClr val="111111"/>
                 </a:solidFill>
-                <a:latin typeface="Poppins Medium" pitchFamily="34" charset="0"/>
-                <a:ea typeface="Poppins Medium" pitchFamily="34" charset="-122"/>
-                <a:cs typeface="Poppins Medium" pitchFamily="34" charset="-120"/>
+                <a:latin typeface="Poppins SemiBold" pitchFamily="34" charset="0"/>
+                <a:ea typeface="Poppins SemiBold" pitchFamily="34" charset="-122"/>
+                <a:cs typeface="Poppins SemiBold" pitchFamily="34" charset="-120"/>
               </a:rPr>
               <a:t>PART 04 · EXECUTION</a:t>
             </a:r>
@@ -6039,9 +6035,9 @@
                 <a:solidFill>
                   <a:srgbClr val="111111"/>
                 </a:solidFill>
-                <a:latin typeface="Poppins Medium" pitchFamily="34" charset="0"/>
-                <a:ea typeface="Poppins Medium" pitchFamily="34" charset="-122"/>
-                <a:cs typeface="Poppins Medium" pitchFamily="34" charset="-120"/>
+                <a:latin typeface="Poppins SemiBold" pitchFamily="34" charset="0"/>
+                <a:ea typeface="Poppins SemiBold" pitchFamily="34" charset="-122"/>
+                <a:cs typeface="Poppins SemiBold" pitchFamily="34" charset="-120"/>
               </a:rPr>
               <a:t>Small fixes, disproportionate impact.</a:t>
             </a:r>
@@ -6101,9 +6097,9 @@
                 <a:solidFill>
                   <a:srgbClr val="111111"/>
                 </a:solidFill>
-                <a:latin typeface="Poppins Medium" pitchFamily="34" charset="0"/>
-                <a:ea typeface="Poppins Medium" pitchFamily="34" charset="-122"/>
-                <a:cs typeface="Poppins Medium" pitchFamily="34" charset="-120"/>
+                <a:latin typeface="Poppins SemiBold" pitchFamily="34" charset="0"/>
+                <a:ea typeface="Poppins SemiBold" pitchFamily="34" charset="-122"/>
+                <a:cs typeface="Poppins SemiBold" pitchFamily="34" charset="-120"/>
               </a:rPr>
               <a:t>Above the fold</a:t>
             </a:r>
@@ -6205,9 +6201,9 @@
                 <a:solidFill>
                   <a:srgbClr val="111111"/>
                 </a:solidFill>
-                <a:latin typeface="Poppins Medium" pitchFamily="34" charset="0"/>
-                <a:ea typeface="Poppins Medium" pitchFamily="34" charset="-122"/>
-                <a:cs typeface="Poppins Medium" pitchFamily="34" charset="-120"/>
+                <a:latin typeface="Poppins SemiBold" pitchFamily="34" charset="0"/>
+                <a:ea typeface="Poppins SemiBold" pitchFamily="34" charset="-122"/>
+                <a:cs typeface="Poppins SemiBold" pitchFamily="34" charset="-120"/>
               </a:rPr>
               <a:t>Missing proof</a:t>
             </a:r>
@@ -6309,9 +6305,9 @@
                 <a:solidFill>
                   <a:srgbClr val="111111"/>
                 </a:solidFill>
-                <a:latin typeface="Poppins Medium" pitchFamily="34" charset="0"/>
-                <a:ea typeface="Poppins Medium" pitchFamily="34" charset="-122"/>
-                <a:cs typeface="Poppins Medium" pitchFamily="34" charset="-120"/>
+                <a:latin typeface="Poppins SemiBold" pitchFamily="34" charset="0"/>
+                <a:ea typeface="Poppins SemiBold" pitchFamily="34" charset="-122"/>
+                <a:cs typeface="Poppins SemiBold" pitchFamily="34" charset="-120"/>
               </a:rPr>
               <a:t>Hierarchy</a:t>
             </a:r>
@@ -6413,9 +6409,9 @@
                 <a:solidFill>
                   <a:srgbClr val="111111"/>
                 </a:solidFill>
-                <a:latin typeface="Poppins Medium" pitchFamily="34" charset="0"/>
-                <a:ea typeface="Poppins Medium" pitchFamily="34" charset="-122"/>
-                <a:cs typeface="Poppins Medium" pitchFamily="34" charset="-120"/>
+                <a:latin typeface="Poppins SemiBold" pitchFamily="34" charset="0"/>
+                <a:ea typeface="Poppins SemiBold" pitchFamily="34" charset="-122"/>
+                <a:cs typeface="Poppins SemiBold" pitchFamily="34" charset="-120"/>
               </a:rPr>
               <a:t>Category</a:t>
             </a:r>
@@ -6517,9 +6513,9 @@
                 <a:solidFill>
                   <a:srgbClr val="111111"/>
                 </a:solidFill>
-                <a:latin typeface="Poppins Medium" pitchFamily="34" charset="0"/>
-                <a:ea typeface="Poppins Medium" pitchFamily="34" charset="-122"/>
-                <a:cs typeface="Poppins Medium" pitchFamily="34" charset="-120"/>
+                <a:latin typeface="Poppins SemiBold" pitchFamily="34" charset="0"/>
+                <a:ea typeface="Poppins SemiBold" pitchFamily="34" charset="-122"/>
+                <a:cs typeface="Poppins SemiBold" pitchFamily="34" charset="-120"/>
               </a:rPr>
               <a:t>Channel language</a:t>
             </a:r>
@@ -6653,9 +6649,9 @@
                 <a:solidFill>
                   <a:srgbClr val="111111"/>
                 </a:solidFill>
-                <a:latin typeface="Poppins Medium" pitchFamily="34" charset="0"/>
-                <a:ea typeface="Poppins Medium" pitchFamily="34" charset="-122"/>
-                <a:cs typeface="Poppins Medium" pitchFamily="34" charset="-120"/>
+                <a:latin typeface="Poppins SemiBold" pitchFamily="34" charset="0"/>
+                <a:ea typeface="Poppins SemiBold" pitchFamily="34" charset="-122"/>
+                <a:cs typeface="Poppins SemiBold" pitchFamily="34" charset="-120"/>
               </a:rPr>
               <a:t>PART 04 · EXECUTION</a:t>
             </a:r>
@@ -6695,9 +6691,9 @@
                 <a:solidFill>
                   <a:srgbClr val="111111"/>
                 </a:solidFill>
-                <a:latin typeface="Poppins Medium" pitchFamily="34" charset="0"/>
-                <a:ea typeface="Poppins Medium" pitchFamily="34" charset="-122"/>
-                <a:cs typeface="Poppins Medium" pitchFamily="34" charset="-120"/>
+                <a:latin typeface="Poppins SemiBold" pitchFamily="34" charset="0"/>
+                <a:ea typeface="Poppins SemiBold" pitchFamily="34" charset="-122"/>
+                <a:cs typeface="Poppins SemiBold" pitchFamily="34" charset="-120"/>
               </a:rPr>
               <a:t>What we can pick up from here.</a:t>
             </a:r>
@@ -6734,9 +6730,9 @@
                 <a:solidFill>
                   <a:srgbClr val="111111"/>
                 </a:solidFill>
-                <a:latin typeface="Poppins Medium" pitchFamily="34" charset="0"/>
-                <a:ea typeface="Poppins Medium" pitchFamily="34" charset="-122"/>
-                <a:cs typeface="Poppins Medium" pitchFamily="34" charset="-120"/>
+                <a:latin typeface="Poppins SemiBold" pitchFamily="34" charset="0"/>
+                <a:ea typeface="Poppins SemiBold" pitchFamily="34" charset="-122"/>
+                <a:cs typeface="Poppins SemiBold" pitchFamily="34" charset="-120"/>
               </a:rPr>
               <a:t>FROM THE BRIEF</a:t>
             </a:r>
@@ -7186,9 +7182,9 @@
                 <a:solidFill>
                   <a:srgbClr val="111111"/>
                 </a:solidFill>
-                <a:latin typeface="Poppins Medium" pitchFamily="34" charset="0"/>
-                <a:ea typeface="Poppins Medium" pitchFamily="34" charset="-122"/>
-                <a:cs typeface="Poppins Medium" pitchFamily="34" charset="-120"/>
+                <a:latin typeface="Poppins SemiBold" pitchFamily="34" charset="0"/>
+                <a:ea typeface="Poppins SemiBold" pitchFamily="34" charset="-122"/>
+                <a:cs typeface="Poppins SemiBold" pitchFamily="34" charset="-120"/>
               </a:rPr>
               <a:t>ALSO WORTH ADDING</a:t>
             </a:r>
@@ -7519,7 +7515,7 @@
         </p:nvSpPr>
         <p:spPr>
           <a:xfrm>
-            <a:off x="804672" y="2194560"/>
+            <a:off x="914400" y="2194560"/>
             <a:ext cx="10362895" cy="1737360"/>
           </a:xfrm>
           <a:prstGeom prst="rect">
@@ -7713,9 +7709,9 @@
                 <a:solidFill>
                   <a:srgbClr val="FAF8F4"/>
                 </a:solidFill>
-                <a:latin typeface="Poppins Light" pitchFamily="34" charset="0"/>
-                <a:ea typeface="Poppins Light" pitchFamily="34" charset="-122"/>
-                <a:cs typeface="Poppins Light" pitchFamily="34" charset="-120"/>
+                <a:latin typeface="Poppins SemiBold" pitchFamily="34" charset="0"/>
+                <a:ea typeface="Poppins SemiBold" pitchFamily="34" charset="-122"/>
+                <a:cs typeface="Poppins SemiBold" pitchFamily="34" charset="-120"/>
               </a:rPr>
               <a:t>PART 01</a:t>
             </a:r>
@@ -7731,7 +7727,7 @@
         </p:nvSpPr>
         <p:spPr>
           <a:xfrm>
-            <a:off x="822960" y="2286000"/>
+            <a:off x="914400" y="2286000"/>
             <a:ext cx="10362895" cy="1737360"/>
           </a:xfrm>
           <a:prstGeom prst="rect">
@@ -7752,9 +7748,9 @@
                 <a:solidFill>
                   <a:srgbClr val="FAF8F4"/>
                 </a:solidFill>
-                <a:latin typeface="Poppins Light" pitchFamily="34" charset="0"/>
-                <a:ea typeface="Poppins Light" pitchFamily="34" charset="-122"/>
-                <a:cs typeface="Poppins Light" pitchFamily="34" charset="-120"/>
+                <a:latin typeface="Poppins SemiBold" pitchFamily="34" charset="0"/>
+                <a:ea typeface="Poppins SemiBold" pitchFamily="34" charset="-122"/>
+                <a:cs typeface="Poppins SemiBold" pitchFamily="34" charset="-120"/>
               </a:rPr>
               <a:t>Context.</a:t>
             </a:r>
@@ -7791,9 +7787,9 @@
                 <a:solidFill>
                   <a:srgbClr val="FAF8F4"/>
                 </a:solidFill>
-                <a:latin typeface="Poppins Light" pitchFamily="34" charset="0"/>
-                <a:ea typeface="Poppins Light" pitchFamily="34" charset="-122"/>
-                <a:cs typeface="Poppins Light" pitchFamily="34" charset="-120"/>
+                <a:latin typeface="Poppins SemiBold" pitchFamily="34" charset="0"/>
+                <a:ea typeface="Poppins SemiBold" pitchFamily="34" charset="-122"/>
+                <a:cs typeface="Poppins SemiBold" pitchFamily="34" charset="-120"/>
               </a:rPr>
               <a:t>What the numbers and the site visit actually say.</a:t>
             </a:r>
@@ -7862,9 +7858,9 @@
                 <a:solidFill>
                   <a:srgbClr val="111111"/>
                 </a:solidFill>
-                <a:latin typeface="Poppins Medium" pitchFamily="34" charset="0"/>
-                <a:ea typeface="Poppins Medium" pitchFamily="34" charset="-122"/>
-                <a:cs typeface="Poppins Medium" pitchFamily="34" charset="-120"/>
+                <a:latin typeface="Poppins SemiBold" pitchFamily="34" charset="0"/>
+                <a:ea typeface="Poppins SemiBold" pitchFamily="34" charset="-122"/>
+                <a:cs typeface="Poppins SemiBold" pitchFamily="34" charset="-120"/>
               </a:rPr>
               <a:t>PART 01 · CONTEXT</a:t>
             </a:r>
@@ -7904,9 +7900,9 @@
                 <a:solidFill>
                   <a:srgbClr val="111111"/>
                 </a:solidFill>
-                <a:latin typeface="Poppins Medium" pitchFamily="34" charset="0"/>
-                <a:ea typeface="Poppins Medium" pitchFamily="34" charset="-122"/>
-                <a:cs typeface="Poppins Medium" pitchFamily="34" charset="-120"/>
+                <a:latin typeface="Poppins SemiBold" pitchFamily="34" charset="0"/>
+                <a:ea typeface="Poppins SemiBold" pitchFamily="34" charset="-122"/>
+                <a:cs typeface="Poppins SemiBold" pitchFamily="34" charset="-120"/>
               </a:rPr>
               <a:t>The overall plan is sound. Focus is the part that is missing.</a:t>
             </a:r>
@@ -7966,9 +7962,9 @@
                 <a:solidFill>
                   <a:srgbClr val="666666"/>
                 </a:solidFill>
-                <a:latin typeface="Poppins Light" pitchFamily="34" charset="0"/>
-                <a:ea typeface="Poppins Light" pitchFamily="34" charset="-122"/>
-                <a:cs typeface="Poppins Light" pitchFamily="34" charset="-120"/>
+                <a:latin typeface="Poppins SemiBold" pitchFamily="34" charset="0"/>
+                <a:ea typeface="Poppins SemiBold" pitchFamily="34" charset="-122"/>
+                <a:cs typeface="Poppins SemiBold" pitchFamily="34" charset="-120"/>
               </a:rPr>
               <a:t>01</a:t>
             </a:r>
@@ -8008,9 +8004,9 @@
                 <a:solidFill>
                   <a:srgbClr val="111111"/>
                 </a:solidFill>
-                <a:latin typeface="Poppins Medium" pitchFamily="34" charset="0"/>
-                <a:ea typeface="Poppins Medium" pitchFamily="34" charset="-122"/>
-                <a:cs typeface="Poppins Medium" pitchFamily="34" charset="-120"/>
+                <a:latin typeface="Poppins SemiBold" pitchFamily="34" charset="0"/>
+                <a:ea typeface="Poppins SemiBold" pitchFamily="34" charset="-122"/>
+                <a:cs typeface="Poppins SemiBold" pitchFamily="34" charset="-120"/>
               </a:rPr>
               <a:t>The strategy is sound. The shape is not.</a:t>
             </a:r>
@@ -8112,9 +8108,9 @@
                 <a:solidFill>
                   <a:srgbClr val="666666"/>
                 </a:solidFill>
-                <a:latin typeface="Poppins Light" pitchFamily="34" charset="0"/>
-                <a:ea typeface="Poppins Light" pitchFamily="34" charset="-122"/>
-                <a:cs typeface="Poppins Light" pitchFamily="34" charset="-120"/>
+                <a:latin typeface="Poppins SemiBold" pitchFamily="34" charset="0"/>
+                <a:ea typeface="Poppins SemiBold" pitchFamily="34" charset="-122"/>
+                <a:cs typeface="Poppins SemiBold" pitchFamily="34" charset="-120"/>
               </a:rPr>
               <a:t>02</a:t>
             </a:r>
@@ -8154,9 +8150,9 @@
                 <a:solidFill>
                   <a:srgbClr val="111111"/>
                 </a:solidFill>
-                <a:latin typeface="Poppins Medium" pitchFamily="34" charset="0"/>
-                <a:ea typeface="Poppins Medium" pitchFamily="34" charset="-122"/>
-                <a:cs typeface="Poppins Medium" pitchFamily="34" charset="-120"/>
+                <a:latin typeface="Poppins SemiBold" pitchFamily="34" charset="0"/>
+                <a:ea typeface="Poppins SemiBold" pitchFamily="34" charset="-122"/>
+                <a:cs typeface="Poppins SemiBold" pitchFamily="34" charset="-120"/>
               </a:rPr>
               <a:t>Two business units cancelling each other out.</a:t>
             </a:r>
@@ -8258,9 +8254,9 @@
                 <a:solidFill>
                   <a:srgbClr val="666666"/>
                 </a:solidFill>
-                <a:latin typeface="Poppins Light" pitchFamily="34" charset="0"/>
-                <a:ea typeface="Poppins Light" pitchFamily="34" charset="-122"/>
-                <a:cs typeface="Poppins Light" pitchFamily="34" charset="-120"/>
+                <a:latin typeface="Poppins SemiBold" pitchFamily="34" charset="0"/>
+                <a:ea typeface="Poppins SemiBold" pitchFamily="34" charset="-122"/>
+                <a:cs typeface="Poppins SemiBold" pitchFamily="34" charset="-120"/>
               </a:rPr>
               <a:t>03</a:t>
             </a:r>
@@ -8300,9 +8296,9 @@
                 <a:solidFill>
                   <a:srgbClr val="111111"/>
                 </a:solidFill>
-                <a:latin typeface="Poppins Medium" pitchFamily="34" charset="0"/>
-                <a:ea typeface="Poppins Medium" pitchFamily="34" charset="-122"/>
-                <a:cs typeface="Poppins Medium" pitchFamily="34" charset="-120"/>
+                <a:latin typeface="Poppins SemiBold" pitchFamily="34" charset="0"/>
+                <a:ea typeface="Poppins SemiBold" pitchFamily="34" charset="-122"/>
+                <a:cs typeface="Poppins SemiBold" pitchFamily="34" charset="-120"/>
               </a:rPr>
               <a:t>The weakest unit is getting the support.</a:t>
             </a:r>
@@ -8436,9 +8432,9 @@
                 <a:solidFill>
                   <a:srgbClr val="111111"/>
                 </a:solidFill>
-                <a:latin typeface="Poppins Medium" pitchFamily="34" charset="0"/>
-                <a:ea typeface="Poppins Medium" pitchFamily="34" charset="-122"/>
-                <a:cs typeface="Poppins Medium" pitchFamily="34" charset="-120"/>
+                <a:latin typeface="Poppins SemiBold" pitchFamily="34" charset="0"/>
+                <a:ea typeface="Poppins SemiBold" pitchFamily="34" charset="-122"/>
+                <a:cs typeface="Poppins SemiBold" pitchFamily="34" charset="-120"/>
               </a:rPr>
               <a:t>PART 01 · CONTEXT</a:t>
             </a:r>
@@ -8478,9 +8474,9 @@
                 <a:solidFill>
                   <a:srgbClr val="111111"/>
                 </a:solidFill>
-                <a:latin typeface="Poppins Medium" pitchFamily="34" charset="0"/>
-                <a:ea typeface="Poppins Medium" pitchFamily="34" charset="-122"/>
-                <a:cs typeface="Poppins Medium" pitchFamily="34" charset="-120"/>
+                <a:latin typeface="Poppins SemiBold" pitchFamily="34" charset="0"/>
+                <a:ea typeface="Poppins SemiBold" pitchFamily="34" charset="-122"/>
+                <a:cs typeface="Poppins SemiBold" pitchFamily="34" charset="-120"/>
               </a:rPr>
               <a:t>Three more, and the last one is the reason to move now.</a:t>
             </a:r>
@@ -8540,9 +8536,9 @@
                 <a:solidFill>
                   <a:srgbClr val="666666"/>
                 </a:solidFill>
-                <a:latin typeface="Poppins Light" pitchFamily="34" charset="0"/>
-                <a:ea typeface="Poppins Light" pitchFamily="34" charset="-122"/>
-                <a:cs typeface="Poppins Light" pitchFamily="34" charset="-120"/>
+                <a:latin typeface="Poppins SemiBold" pitchFamily="34" charset="0"/>
+                <a:ea typeface="Poppins SemiBold" pitchFamily="34" charset="-122"/>
+                <a:cs typeface="Poppins SemiBold" pitchFamily="34" charset="-120"/>
               </a:rPr>
               <a:t>04</a:t>
             </a:r>
@@ -8582,9 +8578,9 @@
                 <a:solidFill>
                   <a:srgbClr val="111111"/>
                 </a:solidFill>
-                <a:latin typeface="Poppins Medium" pitchFamily="34" charset="0"/>
-                <a:ea typeface="Poppins Medium" pitchFamily="34" charset="-122"/>
-                <a:cs typeface="Poppins Medium" pitchFamily="34" charset="-120"/>
+                <a:latin typeface="Poppins SemiBold" pitchFamily="34" charset="0"/>
+                <a:ea typeface="Poppins SemiBold" pitchFamily="34" charset="-122"/>
+                <a:cs typeface="Poppins SemiBold" pitchFamily="34" charset="-120"/>
               </a:rPr>
               <a:t>The offer is good. The stars cannot shine.</a:t>
             </a:r>
@@ -8686,9 +8682,9 @@
                 <a:solidFill>
                   <a:srgbClr val="666666"/>
                 </a:solidFill>
-                <a:latin typeface="Poppins Light" pitchFamily="34" charset="0"/>
-                <a:ea typeface="Poppins Light" pitchFamily="34" charset="-122"/>
-                <a:cs typeface="Poppins Light" pitchFamily="34" charset="-120"/>
+                <a:latin typeface="Poppins SemiBold" pitchFamily="34" charset="0"/>
+                <a:ea typeface="Poppins SemiBold" pitchFamily="34" charset="-122"/>
+                <a:cs typeface="Poppins SemiBold" pitchFamily="34" charset="-120"/>
               </a:rPr>
               <a:t>05</a:t>
             </a:r>
@@ -8728,9 +8724,9 @@
                 <a:solidFill>
                   <a:srgbClr val="111111"/>
                 </a:solidFill>
-                <a:latin typeface="Poppins Medium" pitchFamily="34" charset="0"/>
-                <a:ea typeface="Poppins Medium" pitchFamily="34" charset="-122"/>
-                <a:cs typeface="Poppins Medium" pitchFamily="34" charset="-120"/>
+                <a:latin typeface="Poppins SemiBold" pitchFamily="34" charset="0"/>
+                <a:ea typeface="Poppins SemiBold" pitchFamily="34" charset="-122"/>
+                <a:cs typeface="Poppins SemiBold" pitchFamily="34" charset="-120"/>
               </a:rPr>
               <a:t>Chasing two rabbits, catching neither.</a:t>
             </a:r>
@@ -8832,9 +8828,9 @@
                 <a:solidFill>
                   <a:srgbClr val="666666"/>
                 </a:solidFill>
-                <a:latin typeface="Poppins Light" pitchFamily="34" charset="0"/>
-                <a:ea typeface="Poppins Light" pitchFamily="34" charset="-122"/>
-                <a:cs typeface="Poppins Light" pitchFamily="34" charset="-120"/>
+                <a:latin typeface="Poppins SemiBold" pitchFamily="34" charset="0"/>
+                <a:ea typeface="Poppins SemiBold" pitchFamily="34" charset="-122"/>
+                <a:cs typeface="Poppins SemiBold" pitchFamily="34" charset="-120"/>
               </a:rPr>
               <a:t>06</a:t>
             </a:r>
@@ -8874,9 +8870,9 @@
                 <a:solidFill>
                   <a:srgbClr val="111111"/>
                 </a:solidFill>
-                <a:latin typeface="Poppins Medium" pitchFamily="34" charset="0"/>
-                <a:ea typeface="Poppins Medium" pitchFamily="34" charset="-122"/>
-                <a:cs typeface="Poppins Medium" pitchFamily="34" charset="-120"/>
+                <a:latin typeface="Poppins SemiBold" pitchFamily="34" charset="0"/>
+                <a:ea typeface="Poppins SemiBold" pitchFamily="34" charset="-122"/>
+                <a:cs typeface="Poppins SemiBold" pitchFamily="34" charset="-120"/>
               </a:rPr>
               <a:t>In danger of dying with a beautiful corpse.</a:t>
             </a:r>
@@ -9010,9 +9006,9 @@
                 <a:solidFill>
                   <a:srgbClr val="111111"/>
                 </a:solidFill>
-                <a:latin typeface="Poppins Medium" pitchFamily="34" charset="0"/>
-                <a:ea typeface="Poppins Medium" pitchFamily="34" charset="-122"/>
-                <a:cs typeface="Poppins Medium" pitchFamily="34" charset="-120"/>
+                <a:latin typeface="Poppins SemiBold" pitchFamily="34" charset="0"/>
+                <a:ea typeface="Poppins SemiBold" pitchFamily="34" charset="-122"/>
+                <a:cs typeface="Poppins SemiBold" pitchFamily="34" charset="-120"/>
               </a:rPr>
               <a:t>PART 01 · CONTEXT</a:t>
             </a:r>
@@ -9052,9 +9048,9 @@
                 <a:solidFill>
                   <a:srgbClr val="111111"/>
                 </a:solidFill>
-                <a:latin typeface="Poppins Medium" pitchFamily="34" charset="0"/>
-                <a:ea typeface="Poppins Medium" pitchFamily="34" charset="-122"/>
-                <a:cs typeface="Poppins Medium" pitchFamily="34" charset="-120"/>
+                <a:latin typeface="Poppins SemiBold" pitchFamily="34" charset="0"/>
+                <a:ea typeface="Poppins SemiBold" pitchFamily="34" charset="-122"/>
+                <a:cs typeface="Poppins SemiBold" pitchFamily="34" charset="-120"/>
               </a:rPr>
               <a:t>The room the strategy has to work in.</a:t>
             </a:r>
@@ -9521,9 +9517,9 @@
                 <a:solidFill>
                   <a:srgbClr val="111111"/>
                 </a:solidFill>
-                <a:latin typeface="Poppins Medium" pitchFamily="34" charset="0"/>
-                <a:ea typeface="Poppins Medium" pitchFamily="34" charset="-122"/>
-                <a:cs typeface="Poppins Medium" pitchFamily="34" charset="-120"/>
+                <a:latin typeface="Poppins SemiBold" pitchFamily="34" charset="0"/>
+                <a:ea typeface="Poppins SemiBold" pitchFamily="34" charset="-122"/>
+                <a:cs typeface="Poppins SemiBold" pitchFamily="34" charset="-120"/>
               </a:rPr>
               <a:t>PART 01 · CONTEXT</a:t>
             </a:r>
@@ -9563,9 +9559,9 @@
                 <a:solidFill>
                   <a:srgbClr val="111111"/>
                 </a:solidFill>
-                <a:latin typeface="Poppins Medium" pitchFamily="34" charset="0"/>
-                <a:ea typeface="Poppins Medium" pitchFamily="34" charset="-122"/>
-                <a:cs typeface="Poppins Medium" pitchFamily="34" charset="-120"/>
+                <a:latin typeface="Poppins SemiBold" pitchFamily="34" charset="0"/>
+                <a:ea typeface="Poppins SemiBold" pitchFamily="34" charset="-122"/>
+                <a:cs typeface="Poppins SemiBold" pitchFamily="34" charset="-120"/>
               </a:rPr>
               <a:t>Tap Room is vanity. Refills are sanity.</a:t>
             </a:r>
@@ -9625,9 +9621,9 @@
                 <a:solidFill>
                   <a:srgbClr val="2D5BFF"/>
                 </a:solidFill>
-                <a:latin typeface="Poppins Light" pitchFamily="34" charset="0"/>
-                <a:ea typeface="Poppins Light" pitchFamily="34" charset="-122"/>
-                <a:cs typeface="Poppins Light" pitchFamily="34" charset="-120"/>
+                <a:latin typeface="Poppins SemiBold" pitchFamily="34" charset="0"/>
+                <a:ea typeface="Poppins SemiBold" pitchFamily="34" charset="-122"/>
+                <a:cs typeface="Poppins SemiBold" pitchFamily="34" charset="-120"/>
               </a:rPr>
               <a:t>96-113</a:t>
             </a:r>
@@ -9729,9 +9725,9 @@
                 <a:solidFill>
                   <a:srgbClr val="2D5BFF"/>
                 </a:solidFill>
-                <a:latin typeface="Poppins Light" pitchFamily="34" charset="0"/>
-                <a:ea typeface="Poppins Light" pitchFamily="34" charset="-122"/>
-                <a:cs typeface="Poppins Light" pitchFamily="34" charset="-120"/>
+                <a:latin typeface="Poppins SemiBold" pitchFamily="34" charset="0"/>
+                <a:ea typeface="Poppins SemiBold" pitchFamily="34" charset="-122"/>
+                <a:cs typeface="Poppins SemiBold" pitchFamily="34" charset="-120"/>
               </a:rPr>
               <a:t>56%</a:t>
             </a:r>
@@ -9833,9 +9829,9 @@
                 <a:solidFill>
                   <a:srgbClr val="2D5BFF"/>
                 </a:solidFill>
-                <a:latin typeface="Poppins Light" pitchFamily="34" charset="0"/>
-                <a:ea typeface="Poppins Light" pitchFamily="34" charset="-122"/>
-                <a:cs typeface="Poppins Light" pitchFamily="34" charset="-120"/>
+                <a:latin typeface="Poppins SemiBold" pitchFamily="34" charset="0"/>
+                <a:ea typeface="Poppins SemiBold" pitchFamily="34" charset="-122"/>
+                <a:cs typeface="Poppins SemiBold" pitchFamily="34" charset="-120"/>
               </a:rPr>
               <a:t>20%</a:t>
             </a:r>
@@ -10011,9 +10007,9 @@
                 <a:solidFill>
                   <a:srgbClr val="111111"/>
                 </a:solidFill>
-                <a:latin typeface="Poppins Medium" pitchFamily="34" charset="0"/>
-                <a:ea typeface="Poppins Medium" pitchFamily="34" charset="-122"/>
-                <a:cs typeface="Poppins Medium" pitchFamily="34" charset="-120"/>
+                <a:latin typeface="Poppins SemiBold" pitchFamily="34" charset="0"/>
+                <a:ea typeface="Poppins SemiBold" pitchFamily="34" charset="-122"/>
+                <a:cs typeface="Poppins SemiBold" pitchFamily="34" charset="-120"/>
               </a:rPr>
               <a:t>PART 01 · CONTEXT</a:t>
             </a:r>
@@ -10053,9 +10049,9 @@
                 <a:solidFill>
                   <a:srgbClr val="111111"/>
                 </a:solidFill>
-                <a:latin typeface="Poppins Medium" pitchFamily="34" charset="0"/>
-                <a:ea typeface="Poppins Medium" pitchFamily="34" charset="-122"/>
-                <a:cs typeface="Poppins Medium" pitchFamily="34" charset="-120"/>
+                <a:latin typeface="Poppins SemiBold" pitchFamily="34" charset="0"/>
+                <a:ea typeface="Poppins SemiBold" pitchFamily="34" charset="-122"/>
+                <a:cs typeface="Poppins SemiBold" pitchFamily="34" charset="-120"/>
               </a:rPr>
               <a:t>Two things to hold on to before anything is decided.</a:t>
             </a:r>
@@ -10115,9 +10111,9 @@
                 <a:solidFill>
                   <a:srgbClr val="111111"/>
                 </a:solidFill>
-                <a:latin typeface="Poppins Medium" pitchFamily="34" charset="0"/>
-                <a:ea typeface="Poppins Medium" pitchFamily="34" charset="-122"/>
-                <a:cs typeface="Poppins Medium" pitchFamily="34" charset="-120"/>
+                <a:latin typeface="Poppins SemiBold" pitchFamily="34" charset="0"/>
+                <a:ea typeface="Poppins SemiBold" pitchFamily="34" charset="-122"/>
+                <a:cs typeface="Poppins SemiBold" pitchFamily="34" charset="-120"/>
               </a:rPr>
               <a:t>Who is the real enemy?</a:t>
             </a:r>
@@ -10219,9 +10215,9 @@
                 <a:solidFill>
                   <a:srgbClr val="111111"/>
                 </a:solidFill>
-                <a:latin typeface="Poppins Medium" pitchFamily="34" charset="0"/>
-                <a:ea typeface="Poppins Medium" pitchFamily="34" charset="-122"/>
-                <a:cs typeface="Poppins Medium" pitchFamily="34" charset="-120"/>
+                <a:latin typeface="Poppins SemiBold" pitchFamily="34" charset="0"/>
+                <a:ea typeface="Poppins SemiBold" pitchFamily="34" charset="-122"/>
+                <a:cs typeface="Poppins SemiBold" pitchFamily="34" charset="-120"/>
               </a:rPr>
               <a:t>Handle the census with care</a:t>
             </a:r>
@@ -10356,9 +10352,9 @@
                 <a:solidFill>
                   <a:srgbClr val="FAF8F4"/>
                 </a:solidFill>
-                <a:latin typeface="Poppins Light" pitchFamily="34" charset="0"/>
-                <a:ea typeface="Poppins Light" pitchFamily="34" charset="-122"/>
-                <a:cs typeface="Poppins Light" pitchFamily="34" charset="-120"/>
+                <a:latin typeface="Poppins SemiBold" pitchFamily="34" charset="0"/>
+                <a:ea typeface="Poppins SemiBold" pitchFamily="34" charset="-122"/>
+                <a:cs typeface="Poppins SemiBold" pitchFamily="34" charset="-120"/>
               </a:rPr>
               <a:t>PART 02</a:t>
             </a:r>
@@ -10374,7 +10370,7 @@
         </p:nvSpPr>
         <p:spPr>
           <a:xfrm>
-            <a:off x="822960" y="2286000"/>
+            <a:off x="914400" y="2286000"/>
             <a:ext cx="10362895" cy="1737360"/>
           </a:xfrm>
           <a:prstGeom prst="rect">
@@ -10395,9 +10391,9 @@
                 <a:solidFill>
                   <a:srgbClr val="FAF8F4"/>
                 </a:solidFill>
-                <a:latin typeface="Poppins Light" pitchFamily="34" charset="0"/>
-                <a:ea typeface="Poppins Light" pitchFamily="34" charset="-122"/>
-                <a:cs typeface="Poppins Light" pitchFamily="34" charset="-120"/>
+                <a:latin typeface="Poppins SemiBold" pitchFamily="34" charset="0"/>
+                <a:ea typeface="Poppins SemiBold" pitchFamily="34" charset="-122"/>
+                <a:cs typeface="Poppins SemiBold" pitchFamily="34" charset="-120"/>
               </a:rPr>
               <a:t>Direction.</a:t>
             </a:r>
@@ -10434,9 +10430,9 @@
                 <a:solidFill>
                   <a:srgbClr val="FAF8F4"/>
                 </a:solidFill>
-                <a:latin typeface="Poppins Light" pitchFamily="34" charset="0"/>
-                <a:ea typeface="Poppins Light" pitchFamily="34" charset="-122"/>
-                <a:cs typeface="Poppins Light" pitchFamily="34" charset="-120"/>
+                <a:latin typeface="Poppins SemiBold" pitchFamily="34" charset="0"/>
+                <a:ea typeface="Poppins SemiBold" pitchFamily="34" charset="-122"/>
+                <a:cs typeface="Poppins SemiBold" pitchFamily="34" charset="-120"/>
               </a:rPr>
               <a:t>Ten moves. Five of them come first.</a:t>
             </a:r>
@@ -10505,9 +10501,9 @@
                 <a:solidFill>
                   <a:srgbClr val="111111"/>
                 </a:solidFill>
-                <a:latin typeface="Poppins Medium" pitchFamily="34" charset="0"/>
-                <a:ea typeface="Poppins Medium" pitchFamily="34" charset="-122"/>
-                <a:cs typeface="Poppins Medium" pitchFamily="34" charset="-120"/>
+                <a:latin typeface="Poppins SemiBold" pitchFamily="34" charset="0"/>
+                <a:ea typeface="Poppins SemiBold" pitchFamily="34" charset="-122"/>
+                <a:cs typeface="Poppins SemiBold" pitchFamily="34" charset="-120"/>
               </a:rPr>
               <a:t>PART 02 · DIRECTION</a:t>
             </a:r>
@@ -10547,9 +10543,9 @@
                 <a:solidFill>
                   <a:srgbClr val="111111"/>
                 </a:solidFill>
-                <a:latin typeface="Poppins Medium" pitchFamily="34" charset="0"/>
-                <a:ea typeface="Poppins Medium" pitchFamily="34" charset="-122"/>
-                <a:cs typeface="Poppins Medium" pitchFamily="34" charset="-120"/>
+                <a:latin typeface="Poppins SemiBold" pitchFamily="34" charset="0"/>
+                <a:ea typeface="Poppins SemiBold" pitchFamily="34" charset="-122"/>
+                <a:cs typeface="Poppins SemiBold" pitchFamily="34" charset="-120"/>
               </a:rPr>
               <a:t>Get the core right, then go for more.</a:t>
             </a:r>
@@ -10599,16 +10595,16 @@
                           <a:solidFill>
                             <a:srgbClr val="111111"/>
                           </a:solidFill>
-                          <a:latin typeface="Poppins Medium" pitchFamily="34" charset="0"/>
-                          <a:ea typeface="Poppins Medium" pitchFamily="34" charset="-122"/>
-                          <a:cs typeface="Poppins Medium" pitchFamily="34" charset="-120"/>
+                          <a:latin typeface="Poppins SemiBold" pitchFamily="34" charset="0"/>
+                          <a:ea typeface="Poppins SemiBold" pitchFamily="34" charset="-122"/>
+                          <a:cs typeface="Poppins SemiBold" pitchFamily="34" charset="-120"/>
                         </a:rPr>
                         <a:t>MOVE</a:t>
                       </a:r>
                       <a:endParaRPr lang="en-US" sz="900" dirty="0">
-                        <a:latin typeface="Poppins Medium" charset="0"/>
-                        <a:ea typeface="Poppins Medium" charset="0"/>
-                        <a:cs typeface="Poppins Medium" charset="0"/>
+                        <a:latin typeface="Poppins SemiBold" charset="0"/>
+                        <a:ea typeface="Poppins SemiBold" charset="0"/>
+                        <a:cs typeface="Poppins SemiBold" charset="0"/>
                       </a:endParaRPr>
                     </a:p>
                   </a:txBody>
@@ -10649,16 +10645,16 @@
                           <a:solidFill>
                             <a:srgbClr val="111111"/>
                           </a:solidFill>
-                          <a:latin typeface="Poppins Medium" pitchFamily="34" charset="0"/>
-                          <a:ea typeface="Poppins Medium" pitchFamily="34" charset="-122"/>
-                          <a:cs typeface="Poppins Medium" pitchFamily="34" charset="-120"/>
+                          <a:latin typeface="Poppins SemiBold" pitchFamily="34" charset="0"/>
+                          <a:ea typeface="Poppins SemiBold" pitchFamily="34" charset="-122"/>
+                          <a:cs typeface="Poppins SemiBold" pitchFamily="34" charset="-120"/>
                         </a:rPr>
                         <a:t>THE SHIFT</a:t>
                       </a:r>
                       <a:endParaRPr lang="en-US" sz="900" dirty="0">
-                        <a:latin typeface="Poppins Medium" charset="0"/>
-                        <a:ea typeface="Poppins Medium" charset="0"/>
-                        <a:cs typeface="Poppins Medium" charset="0"/>
+                        <a:latin typeface="Poppins SemiBold" charset="0"/>
+                        <a:ea typeface="Poppins SemiBold" charset="0"/>
+                        <a:cs typeface="Poppins SemiBold" charset="0"/>
                       </a:endParaRPr>
                     </a:p>
                   </a:txBody>
@@ -10699,16 +10695,16 @@
                           <a:solidFill>
                             <a:srgbClr val="111111"/>
                           </a:solidFill>
-                          <a:latin typeface="Poppins Medium" pitchFamily="34" charset="0"/>
-                          <a:ea typeface="Poppins Medium" pitchFamily="34" charset="-122"/>
-                          <a:cs typeface="Poppins Medium" pitchFamily="34" charset="-120"/>
+                          <a:latin typeface="Poppins SemiBold" pitchFamily="34" charset="0"/>
+                          <a:ea typeface="Poppins SemiBold" pitchFamily="34" charset="-122"/>
+                          <a:cs typeface="Poppins SemiBold" pitchFamily="34" charset="-120"/>
                         </a:rPr>
                         <a:t>PROOF</a:t>
                       </a:r>
                       <a:endParaRPr lang="en-US" sz="900" dirty="0">
-                        <a:latin typeface="Poppins Medium" charset="0"/>
-                        <a:ea typeface="Poppins Medium" charset="0"/>
-                        <a:cs typeface="Poppins Medium" charset="0"/>
+                        <a:latin typeface="Poppins SemiBold" charset="0"/>
+                        <a:ea typeface="Poppins SemiBold" charset="0"/>
+                        <a:cs typeface="Poppins SemiBold" charset="0"/>
                       </a:endParaRPr>
                     </a:p>
                   </a:txBody>
@@ -10749,16 +10745,16 @@
                           <a:solidFill>
                             <a:srgbClr val="111111"/>
                           </a:solidFill>
-                          <a:latin typeface="Poppins Medium" pitchFamily="34" charset="0"/>
-                          <a:ea typeface="Poppins Medium" pitchFamily="34" charset="-122"/>
-                          <a:cs typeface="Poppins Medium" pitchFamily="34" charset="-120"/>
+                          <a:latin typeface="Poppins SemiBold" pitchFamily="34" charset="0"/>
+                          <a:ea typeface="Poppins SemiBold" pitchFamily="34" charset="-122"/>
+                          <a:cs typeface="Poppins SemiBold" pitchFamily="34" charset="-120"/>
                         </a:rPr>
                         <a:t>FIRST STEPS</a:t>
                       </a:r>
                       <a:endParaRPr lang="en-US" sz="900" dirty="0">
-                        <a:latin typeface="Poppins Medium" charset="0"/>
-                        <a:ea typeface="Poppins Medium" charset="0"/>
-                        <a:cs typeface="Poppins Medium" charset="0"/>
+                        <a:latin typeface="Poppins SemiBold" charset="0"/>
+                        <a:ea typeface="Poppins SemiBold" charset="0"/>
+                        <a:cs typeface="Poppins SemiBold" charset="0"/>
                       </a:endParaRPr>
                     </a:p>
                   </a:txBody>
@@ -10804,16 +10800,16 @@
                           <a:solidFill>
                             <a:srgbClr val="111111"/>
                           </a:solidFill>
-                          <a:latin typeface="Poppins Medium" pitchFamily="34" charset="0"/>
-                          <a:ea typeface="Poppins Medium" pitchFamily="34" charset="-122"/>
-                          <a:cs typeface="Poppins Medium" pitchFamily="34" charset="-120"/>
+                          <a:latin typeface="Poppins SemiBold" pitchFamily="34" charset="0"/>
+                          <a:ea typeface="Poppins SemiBold" pitchFamily="34" charset="-122"/>
+                          <a:cs typeface="Poppins SemiBold" pitchFamily="34" charset="-120"/>
                         </a:rPr>
                         <a:t>01  Tap Room: pause and pivot</a:t>
                       </a:r>
                       <a:endParaRPr lang="en-US" sz="1100" dirty="0">
-                        <a:latin typeface="Poppins Medium" charset="0"/>
-                        <a:ea typeface="Poppins Medium" charset="0"/>
-                        <a:cs typeface="Poppins Medium" charset="0"/>
+                        <a:latin typeface="Poppins SemiBold" charset="0"/>
+                        <a:ea typeface="Poppins SemiBold" charset="0"/>
+                        <a:cs typeface="Poppins SemiBold" charset="0"/>
                       </a:endParaRPr>
                     </a:p>
                   </a:txBody>
@@ -11006,16 +11002,16 @@
                           <a:solidFill>
                             <a:srgbClr val="111111"/>
                           </a:solidFill>
-                          <a:latin typeface="Poppins Medium" pitchFamily="34" charset="0"/>
-                          <a:ea typeface="Poppins Medium" pitchFamily="34" charset="-122"/>
-                          <a:cs typeface="Poppins Medium" pitchFamily="34" charset="-120"/>
+                          <a:latin typeface="Poppins SemiBold" pitchFamily="34" charset="0"/>
+                          <a:ea typeface="Poppins SemiBold" pitchFamily="34" charset="-122"/>
+                          <a:cs typeface="Poppins SemiBold" pitchFamily="34" charset="-120"/>
                         </a:rPr>
                         <a:t>02  Convert the owners already sold</a:t>
                       </a:r>
                       <a:endParaRPr lang="en-US" sz="1100" dirty="0">
-                        <a:latin typeface="Poppins Medium" charset="0"/>
-                        <a:ea typeface="Poppins Medium" charset="0"/>
-                        <a:cs typeface="Poppins Medium" charset="0"/>
+                        <a:latin typeface="Poppins SemiBold" charset="0"/>
+                        <a:ea typeface="Poppins SemiBold" charset="0"/>
+                        <a:cs typeface="Poppins SemiBold" charset="0"/>
                       </a:endParaRPr>
                     </a:p>
                   </a:txBody>
@@ -11208,16 +11204,16 @@
                           <a:solidFill>
                             <a:srgbClr val="111111"/>
                           </a:solidFill>
-                          <a:latin typeface="Poppins Medium" pitchFamily="34" charset="0"/>
-                          <a:ea typeface="Poppins Medium" pitchFamily="34" charset="-122"/>
-                          <a:cs typeface="Poppins Medium" pitchFamily="34" charset="-120"/>
+                          <a:latin typeface="Poppins SemiBold" pitchFamily="34" charset="0"/>
+                          <a:ea typeface="Poppins SemiBold" pitchFamily="34" charset="-122"/>
+                          <a:cs typeface="Poppins SemiBold" pitchFamily="34" charset="-120"/>
                         </a:rPr>
                         <a:t>03  Remove all friction in refills</a:t>
                       </a:r>
                       <a:endParaRPr lang="en-US" sz="1100" dirty="0">
-                        <a:latin typeface="Poppins Medium" charset="0"/>
-                        <a:ea typeface="Poppins Medium" charset="0"/>
-                        <a:cs typeface="Poppins Medium" charset="0"/>
+                        <a:latin typeface="Poppins SemiBold" charset="0"/>
+                        <a:ea typeface="Poppins SemiBold" charset="0"/>
+                        <a:cs typeface="Poppins SemiBold" charset="0"/>
                       </a:endParaRPr>
                     </a:p>
                   </a:txBody>
@@ -11410,16 +11406,16 @@
                           <a:solidFill>
                             <a:srgbClr val="111111"/>
                           </a:solidFill>
-                          <a:latin typeface="Poppins Medium" pitchFamily="34" charset="0"/>
-                          <a:ea typeface="Poppins Medium" pitchFamily="34" charset="-122"/>
-                          <a:cs typeface="Poppins Medium" pitchFamily="34" charset="-120"/>
+                          <a:latin typeface="Poppins SemiBold" pitchFamily="34" charset="0"/>
+                          <a:ea typeface="Poppins SemiBold" pitchFamily="34" charset="-122"/>
+                          <a:cs typeface="Poppins SemiBold" pitchFamily="34" charset="-120"/>
                         </a:rPr>
                         <a:t>04  Rationalise the range</a:t>
                       </a:r>
                       <a:endParaRPr lang="en-US" sz="1100" dirty="0">
-                        <a:latin typeface="Poppins Medium" charset="0"/>
-                        <a:ea typeface="Poppins Medium" charset="0"/>
-                        <a:cs typeface="Poppins Medium" charset="0"/>
+                        <a:latin typeface="Poppins SemiBold" charset="0"/>
+                        <a:ea typeface="Poppins SemiBold" charset="0"/>
+                        <a:cs typeface="Poppins SemiBold" charset="0"/>
                       </a:endParaRPr>
                     </a:p>
                   </a:txBody>
@@ -11612,16 +11608,16 @@
                           <a:solidFill>
                             <a:srgbClr val="111111"/>
                           </a:solidFill>
-                          <a:latin typeface="Poppins Medium" pitchFamily="34" charset="0"/>
-                          <a:ea typeface="Poppins Medium" pitchFamily="34" charset="-122"/>
-                          <a:cs typeface="Poppins Medium" pitchFamily="34" charset="-120"/>
+                          <a:latin typeface="Poppins SemiBold" pitchFamily="34" charset="0"/>
+                          <a:ea typeface="Poppins SemiBold" pitchFamily="34" charset="-122"/>
+                          <a:cs typeface="Poppins SemiBold" pitchFamily="34" charset="-120"/>
                         </a:rPr>
                         <a:t>05  Ride the wellness wave</a:t>
                       </a:r>
                       <a:endParaRPr lang="en-US" sz="1100" dirty="0">
-                        <a:latin typeface="Poppins Medium" charset="0"/>
-                        <a:ea typeface="Poppins Medium" charset="0"/>
-                        <a:cs typeface="Poppins Medium" charset="0"/>
+                        <a:latin typeface="Poppins SemiBold" charset="0"/>
+                        <a:ea typeface="Poppins SemiBold" charset="0"/>
+                        <a:cs typeface="Poppins SemiBold" charset="0"/>
                       </a:endParaRPr>
                     </a:p>
                   </a:txBody>

--- a/00 Admin/06 Presentations/JP_TapThat_ThePivot_v03.pptx
+++ b/00 Admin/06 Presentations/JP_TapThat_ThePivot_v03.pptx
@@ -2413,13 +2413,13 @@
               <a:buNone/>
             </a:pPr>
             <a:r>
-              <a:rPr lang="en-US" sz="900" spc="200" kern="0" dirty="0">
+              <a:rPr lang="en-US" sz="900" b="1" spc="200" kern="0" dirty="0">
                 <a:solidFill>
                   <a:srgbClr val="111111"/>
                 </a:solidFill>
-                <a:latin typeface="Poppins SemiBold" pitchFamily="34" charset="0"/>
-                <a:ea typeface="Poppins SemiBold" pitchFamily="34" charset="-122"/>
-                <a:cs typeface="Poppins SemiBold" pitchFamily="34" charset="-120"/>
+                <a:latin typeface="Poppins" pitchFamily="34" charset="0"/>
+                <a:ea typeface="Poppins" pitchFamily="34" charset="-122"/>
+                <a:cs typeface="Poppins" pitchFamily="34" charset="-120"/>
               </a:rPr>
               <a:t>JP · TAP THAT · THE PIVOT</a:t>
             </a:r>
@@ -2452,13 +2452,13 @@
               <a:buNone/>
             </a:pPr>
             <a:r>
-              <a:rPr lang="en-US" sz="7200" dirty="0">
+              <a:rPr lang="en-US" sz="7200" b="1" dirty="0">
                 <a:solidFill>
                   <a:srgbClr val="111111"/>
                 </a:solidFill>
-                <a:latin typeface="Poppins SemiBold" pitchFamily="34" charset="0"/>
-                <a:ea typeface="Poppins SemiBold" pitchFamily="34" charset="-122"/>
-                <a:cs typeface="Poppins SemiBold" pitchFamily="34" charset="-120"/>
+                <a:latin typeface="Poppins" pitchFamily="34" charset="0"/>
+                <a:ea typeface="Poppins" pitchFamily="34" charset="-122"/>
+                <a:cs typeface="Poppins" pitchFamily="34" charset="-120"/>
               </a:rPr>
               <a:t>The Pivot</a:t>
             </a:r>
@@ -2601,13 +2601,13 @@
               <a:buNone/>
             </a:pPr>
             <a:r>
-              <a:rPr lang="en-US" sz="900" spc="200" kern="0" dirty="0">
+              <a:rPr lang="en-US" sz="900" b="1" spc="200" kern="0" dirty="0">
                 <a:solidFill>
                   <a:srgbClr val="111111"/>
                 </a:solidFill>
-                <a:latin typeface="Poppins SemiBold" pitchFamily="34" charset="0"/>
-                <a:ea typeface="Poppins SemiBold" pitchFamily="34" charset="-122"/>
-                <a:cs typeface="Poppins SemiBold" pitchFamily="34" charset="-120"/>
+                <a:latin typeface="Poppins" pitchFamily="34" charset="0"/>
+                <a:ea typeface="Poppins" pitchFamily="34" charset="-122"/>
+                <a:cs typeface="Poppins" pitchFamily="34" charset="-120"/>
               </a:rPr>
               <a:t>PART 02 · DIRECTION</a:t>
             </a:r>
@@ -2643,13 +2643,13 @@
               <a:buNone/>
             </a:pPr>
             <a:r>
-              <a:rPr lang="en-US" sz="4200" dirty="0">
+              <a:rPr lang="en-US" sz="4200" b="1" dirty="0">
                 <a:solidFill>
                   <a:srgbClr val="111111"/>
                 </a:solidFill>
-                <a:latin typeface="Poppins SemiBold" pitchFamily="34" charset="0"/>
-                <a:ea typeface="Poppins SemiBold" pitchFamily="34" charset="-122"/>
-                <a:cs typeface="Poppins SemiBold" pitchFamily="34" charset="-120"/>
+                <a:latin typeface="Poppins" pitchFamily="34" charset="0"/>
+                <a:ea typeface="Poppins" pitchFamily="34" charset="-122"/>
+                <a:cs typeface="Poppins" pitchFamily="34" charset="-120"/>
               </a:rPr>
               <a:t>Once the core is running, extend it.</a:t>
             </a:r>
@@ -2695,20 +2695,20 @@
                         <a:buNone/>
                       </a:pPr>
                       <a:r>
-                        <a:rPr lang="en-US" sz="900" spc="200" kern="0" dirty="0">
+                        <a:rPr lang="en-US" sz="900" b="1" spc="200" kern="0" dirty="0">
                           <a:solidFill>
                             <a:srgbClr val="111111"/>
                           </a:solidFill>
-                          <a:latin typeface="Poppins SemiBold" pitchFamily="34" charset="0"/>
-                          <a:ea typeface="Poppins SemiBold" pitchFamily="34" charset="-122"/>
-                          <a:cs typeface="Poppins SemiBold" pitchFamily="34" charset="-120"/>
+                          <a:latin typeface="Poppins" pitchFamily="34" charset="0"/>
+                          <a:ea typeface="Poppins" pitchFamily="34" charset="-122"/>
+                          <a:cs typeface="Poppins" pitchFamily="34" charset="-120"/>
                         </a:rPr>
                         <a:t>MOVE</a:t>
                       </a:r>
                       <a:endParaRPr lang="en-US" sz="900" dirty="0">
-                        <a:latin typeface="Poppins SemiBold" charset="0"/>
-                        <a:ea typeface="Poppins SemiBold" charset="0"/>
-                        <a:cs typeface="Poppins SemiBold" charset="0"/>
+                        <a:latin typeface="Poppins" charset="0"/>
+                        <a:ea typeface="Poppins" charset="0"/>
+                        <a:cs typeface="Poppins" charset="0"/>
                       </a:endParaRPr>
                     </a:p>
                   </a:txBody>
@@ -2745,20 +2745,20 @@
                         <a:buNone/>
                       </a:pPr>
                       <a:r>
-                        <a:rPr lang="en-US" sz="900" spc="200" kern="0" dirty="0">
+                        <a:rPr lang="en-US" sz="900" b="1" spc="200" kern="0" dirty="0">
                           <a:solidFill>
                             <a:srgbClr val="111111"/>
                           </a:solidFill>
-                          <a:latin typeface="Poppins SemiBold" pitchFamily="34" charset="0"/>
-                          <a:ea typeface="Poppins SemiBold" pitchFamily="34" charset="-122"/>
-                          <a:cs typeface="Poppins SemiBold" pitchFamily="34" charset="-120"/>
+                          <a:latin typeface="Poppins" pitchFamily="34" charset="0"/>
+                          <a:ea typeface="Poppins" pitchFamily="34" charset="-122"/>
+                          <a:cs typeface="Poppins" pitchFamily="34" charset="-120"/>
                         </a:rPr>
                         <a:t>THE SHIFT</a:t>
                       </a:r>
                       <a:endParaRPr lang="en-US" sz="900" dirty="0">
-                        <a:latin typeface="Poppins SemiBold" charset="0"/>
-                        <a:ea typeface="Poppins SemiBold" charset="0"/>
-                        <a:cs typeface="Poppins SemiBold" charset="0"/>
+                        <a:latin typeface="Poppins" charset="0"/>
+                        <a:ea typeface="Poppins" charset="0"/>
+                        <a:cs typeface="Poppins" charset="0"/>
                       </a:endParaRPr>
                     </a:p>
                   </a:txBody>
@@ -2795,20 +2795,20 @@
                         <a:buNone/>
                       </a:pPr>
                       <a:r>
-                        <a:rPr lang="en-US" sz="900" spc="200" kern="0" dirty="0">
+                        <a:rPr lang="en-US" sz="900" b="1" spc="200" kern="0" dirty="0">
                           <a:solidFill>
                             <a:srgbClr val="111111"/>
                           </a:solidFill>
-                          <a:latin typeface="Poppins SemiBold" pitchFamily="34" charset="0"/>
-                          <a:ea typeface="Poppins SemiBold" pitchFamily="34" charset="-122"/>
-                          <a:cs typeface="Poppins SemiBold" pitchFamily="34" charset="-120"/>
+                          <a:latin typeface="Poppins" pitchFamily="34" charset="0"/>
+                          <a:ea typeface="Poppins" pitchFamily="34" charset="-122"/>
+                          <a:cs typeface="Poppins" pitchFamily="34" charset="-120"/>
                         </a:rPr>
                         <a:t>PROOF</a:t>
                       </a:r>
                       <a:endParaRPr lang="en-US" sz="900" dirty="0">
-                        <a:latin typeface="Poppins SemiBold" charset="0"/>
-                        <a:ea typeface="Poppins SemiBold" charset="0"/>
-                        <a:cs typeface="Poppins SemiBold" charset="0"/>
+                        <a:latin typeface="Poppins" charset="0"/>
+                        <a:ea typeface="Poppins" charset="0"/>
+                        <a:cs typeface="Poppins" charset="0"/>
                       </a:endParaRPr>
                     </a:p>
                   </a:txBody>
@@ -2845,20 +2845,20 @@
                         <a:buNone/>
                       </a:pPr>
                       <a:r>
-                        <a:rPr lang="en-US" sz="900" spc="200" kern="0" dirty="0">
+                        <a:rPr lang="en-US" sz="900" b="1" spc="200" kern="0" dirty="0">
                           <a:solidFill>
                             <a:srgbClr val="111111"/>
                           </a:solidFill>
-                          <a:latin typeface="Poppins SemiBold" pitchFamily="34" charset="0"/>
-                          <a:ea typeface="Poppins SemiBold" pitchFamily="34" charset="-122"/>
-                          <a:cs typeface="Poppins SemiBold" pitchFamily="34" charset="-120"/>
+                          <a:latin typeface="Poppins" pitchFamily="34" charset="0"/>
+                          <a:ea typeface="Poppins" pitchFamily="34" charset="-122"/>
+                          <a:cs typeface="Poppins" pitchFamily="34" charset="-120"/>
                         </a:rPr>
                         <a:t>FIRST STEPS</a:t>
                       </a:r>
                       <a:endParaRPr lang="en-US" sz="900" dirty="0">
-                        <a:latin typeface="Poppins SemiBold" charset="0"/>
-                        <a:ea typeface="Poppins SemiBold" charset="0"/>
-                        <a:cs typeface="Poppins SemiBold" charset="0"/>
+                        <a:latin typeface="Poppins" charset="0"/>
+                        <a:ea typeface="Poppins" charset="0"/>
+                        <a:cs typeface="Poppins" charset="0"/>
                       </a:endParaRPr>
                     </a:p>
                   </a:txBody>
@@ -2900,20 +2900,20 @@
                         <a:buNone/>
                       </a:pPr>
                       <a:r>
-                        <a:rPr lang="en-US" sz="1100" dirty="0">
+                        <a:rPr lang="en-US" sz="1100" b="1" dirty="0">
                           <a:solidFill>
                             <a:srgbClr val="111111"/>
                           </a:solidFill>
-                          <a:latin typeface="Poppins SemiBold" pitchFamily="34" charset="0"/>
-                          <a:ea typeface="Poppins SemiBold" pitchFamily="34" charset="-122"/>
-                          <a:cs typeface="Poppins SemiBold" pitchFamily="34" charset="-120"/>
+                          <a:latin typeface="Poppins" pitchFamily="34" charset="0"/>
+                          <a:ea typeface="Poppins" pitchFamily="34" charset="-122"/>
+                          <a:cs typeface="Poppins" pitchFamily="34" charset="-120"/>
                         </a:rPr>
                         <a:t>06  Full press on wholesale</a:t>
                       </a:r>
                       <a:endParaRPr lang="en-US" sz="1100" dirty="0">
-                        <a:latin typeface="Poppins SemiBold" charset="0"/>
-                        <a:ea typeface="Poppins SemiBold" charset="0"/>
-                        <a:cs typeface="Poppins SemiBold" charset="0"/>
+                        <a:latin typeface="Poppins" charset="0"/>
+                        <a:ea typeface="Poppins" charset="0"/>
+                        <a:cs typeface="Poppins" charset="0"/>
                       </a:endParaRPr>
                     </a:p>
                   </a:txBody>
@@ -3102,20 +3102,20 @@
                         <a:buNone/>
                       </a:pPr>
                       <a:r>
-                        <a:rPr lang="en-US" sz="1100" dirty="0">
+                        <a:rPr lang="en-US" sz="1100" b="1" dirty="0">
                           <a:solidFill>
                             <a:srgbClr val="111111"/>
                           </a:solidFill>
-                          <a:latin typeface="Poppins SemiBold" pitchFamily="34" charset="0"/>
-                          <a:ea typeface="Poppins SemiBold" pitchFamily="34" charset="-122"/>
-                          <a:cs typeface="Poppins SemiBold" pitchFamily="34" charset="-120"/>
+                          <a:latin typeface="Poppins" pitchFamily="34" charset="0"/>
+                          <a:ea typeface="Poppins" pitchFamily="34" charset="-122"/>
+                          <a:cs typeface="Poppins" pitchFamily="34" charset="-120"/>
                         </a:rPr>
                         <a:t>07  Design for her</a:t>
                       </a:r>
                       <a:endParaRPr lang="en-US" sz="1100" dirty="0">
-                        <a:latin typeface="Poppins SemiBold" charset="0"/>
-                        <a:ea typeface="Poppins SemiBold" charset="0"/>
-                        <a:cs typeface="Poppins SemiBold" charset="0"/>
+                        <a:latin typeface="Poppins" charset="0"/>
+                        <a:ea typeface="Poppins" charset="0"/>
+                        <a:cs typeface="Poppins" charset="0"/>
                       </a:endParaRPr>
                     </a:p>
                   </a:txBody>
@@ -3304,20 +3304,20 @@
                         <a:buNone/>
                       </a:pPr>
                       <a:r>
-                        <a:rPr lang="en-US" sz="1100" dirty="0">
+                        <a:rPr lang="en-US" sz="1100" b="1" dirty="0">
                           <a:solidFill>
                             <a:srgbClr val="111111"/>
                           </a:solidFill>
-                          <a:latin typeface="Poppins SemiBold" pitchFamily="34" charset="0"/>
-                          <a:ea typeface="Poppins SemiBold" pitchFamily="34" charset="-122"/>
-                          <a:cs typeface="Poppins SemiBold" pitchFamily="34" charset="-120"/>
+                          <a:latin typeface="Poppins" pitchFamily="34" charset="0"/>
+                          <a:ea typeface="Poppins" pitchFamily="34" charset="-122"/>
+                          <a:cs typeface="Poppins" pitchFamily="34" charset="-120"/>
                         </a:rPr>
                         <a:t>08  Personalise comms and lifetime value</a:t>
                       </a:r>
                       <a:endParaRPr lang="en-US" sz="1100" dirty="0">
-                        <a:latin typeface="Poppins SemiBold" charset="0"/>
-                        <a:ea typeface="Poppins SemiBold" charset="0"/>
-                        <a:cs typeface="Poppins SemiBold" charset="0"/>
+                        <a:latin typeface="Poppins" charset="0"/>
+                        <a:ea typeface="Poppins" charset="0"/>
+                        <a:cs typeface="Poppins" charset="0"/>
                       </a:endParaRPr>
                     </a:p>
                   </a:txBody>
@@ -3506,20 +3506,20 @@
                         <a:buNone/>
                       </a:pPr>
                       <a:r>
-                        <a:rPr lang="en-US" sz="1100" dirty="0">
+                        <a:rPr lang="en-US" sz="1100" b="1" dirty="0">
                           <a:solidFill>
                             <a:srgbClr val="111111"/>
                           </a:solidFill>
-                          <a:latin typeface="Poppins SemiBold" pitchFamily="34" charset="0"/>
-                          <a:ea typeface="Poppins SemiBold" pitchFamily="34" charset="-122"/>
-                          <a:cs typeface="Poppins SemiBold" pitchFamily="34" charset="-120"/>
+                          <a:latin typeface="Poppins" pitchFamily="34" charset="0"/>
+                          <a:ea typeface="Poppins" pitchFamily="34" charset="-122"/>
+                          <a:cs typeface="Poppins" pitchFamily="34" charset="-120"/>
                         </a:rPr>
                         <a:t>09  Make the kegerator worth writing about</a:t>
                       </a:r>
                       <a:endParaRPr lang="en-US" sz="1100" dirty="0">
-                        <a:latin typeface="Poppins SemiBold" charset="0"/>
-                        <a:ea typeface="Poppins SemiBold" charset="0"/>
-                        <a:cs typeface="Poppins SemiBold" charset="0"/>
+                        <a:latin typeface="Poppins" charset="0"/>
+                        <a:ea typeface="Poppins" charset="0"/>
+                        <a:cs typeface="Poppins" charset="0"/>
                       </a:endParaRPr>
                     </a:p>
                   </a:txBody>
@@ -3708,20 +3708,20 @@
                         <a:buNone/>
                       </a:pPr>
                       <a:r>
-                        <a:rPr lang="en-US" sz="1100" dirty="0">
+                        <a:rPr lang="en-US" sz="1100" b="1" dirty="0">
                           <a:solidFill>
                             <a:srgbClr val="111111"/>
                           </a:solidFill>
-                          <a:latin typeface="Poppins SemiBold" pitchFamily="34" charset="0"/>
-                          <a:ea typeface="Poppins SemiBold" pitchFamily="34" charset="-122"/>
-                          <a:cs typeface="Poppins SemiBold" pitchFamily="34" charset="-120"/>
+                          <a:latin typeface="Poppins" pitchFamily="34" charset="0"/>
+                          <a:ea typeface="Poppins" pitchFamily="34" charset="-122"/>
+                          <a:cs typeface="Poppins" pitchFamily="34" charset="-120"/>
                         </a:rPr>
                         <a:t>10  Package around the duopoly</a:t>
                       </a:r>
                       <a:endParaRPr lang="en-US" sz="1100" dirty="0">
-                        <a:latin typeface="Poppins SemiBold" charset="0"/>
-                        <a:ea typeface="Poppins SemiBold" charset="0"/>
-                        <a:cs typeface="Poppins SemiBold" charset="0"/>
+                        <a:latin typeface="Poppins" charset="0"/>
+                        <a:ea typeface="Poppins" charset="0"/>
+                        <a:cs typeface="Poppins" charset="0"/>
                       </a:endParaRPr>
                     </a:p>
                   </a:txBody>
@@ -3982,13 +3982,13 @@
               <a:buNone/>
             </a:pPr>
             <a:r>
-              <a:rPr lang="en-US" sz="1400" spc="300" kern="0" dirty="0">
+              <a:rPr lang="en-US" sz="1400" b="1" spc="300" kern="0" dirty="0">
                 <a:solidFill>
                   <a:srgbClr val="FAF8F4"/>
                 </a:solidFill>
-                <a:latin typeface="Poppins SemiBold" pitchFamily="34" charset="0"/>
-                <a:ea typeface="Poppins SemiBold" pitchFamily="34" charset="-122"/>
-                <a:cs typeface="Poppins SemiBold" pitchFamily="34" charset="-120"/>
+                <a:latin typeface="Poppins" pitchFamily="34" charset="0"/>
+                <a:ea typeface="Poppins" pitchFamily="34" charset="-122"/>
+                <a:cs typeface="Poppins" pitchFamily="34" charset="-120"/>
               </a:rPr>
               <a:t>PART 03</a:t>
             </a:r>
@@ -4021,13 +4021,13 @@
               <a:buNone/>
             </a:pPr>
             <a:r>
-              <a:rPr lang="en-US" sz="12000" dirty="0">
+              <a:rPr lang="en-US" sz="12000" b="1" dirty="0">
                 <a:solidFill>
                   <a:srgbClr val="FAF8F4"/>
                 </a:solidFill>
-                <a:latin typeface="Poppins SemiBold" pitchFamily="34" charset="0"/>
-                <a:ea typeface="Poppins SemiBold" pitchFamily="34" charset="-122"/>
-                <a:cs typeface="Poppins SemiBold" pitchFamily="34" charset="-120"/>
+                <a:latin typeface="Poppins" pitchFamily="34" charset="0"/>
+                <a:ea typeface="Poppins" pitchFamily="34" charset="-122"/>
+                <a:cs typeface="Poppins" pitchFamily="34" charset="-120"/>
               </a:rPr>
               <a:t>Collateral.</a:t>
             </a:r>
@@ -4060,13 +4060,13 @@
               <a:buNone/>
             </a:pPr>
             <a:r>
-              <a:rPr lang="en-US" sz="1600" dirty="0">
+              <a:rPr lang="en-US" sz="1600" b="1" dirty="0">
                 <a:solidFill>
                   <a:srgbClr val="FAF8F4"/>
                 </a:solidFill>
-                <a:latin typeface="Poppins SemiBold" pitchFamily="34" charset="0"/>
-                <a:ea typeface="Poppins SemiBold" pitchFamily="34" charset="-122"/>
-                <a:cs typeface="Poppins SemiBold" pitchFamily="34" charset="-120"/>
+                <a:latin typeface="Poppins" pitchFamily="34" charset="0"/>
+                <a:ea typeface="Poppins" pitchFamily="34" charset="-122"/>
+                <a:cs typeface="Poppins" pitchFamily="34" charset="-120"/>
               </a:rPr>
               <a:t>What the destination business looks like on paper.</a:t>
             </a:r>
@@ -4131,13 +4131,13 @@
               <a:buNone/>
             </a:pPr>
             <a:r>
-              <a:rPr lang="en-US" sz="900" spc="200" kern="0" dirty="0">
+              <a:rPr lang="en-US" sz="900" b="1" spc="200" kern="0" dirty="0">
                 <a:solidFill>
                   <a:srgbClr val="111111"/>
                 </a:solidFill>
-                <a:latin typeface="Poppins SemiBold" pitchFamily="34" charset="0"/>
-                <a:ea typeface="Poppins SemiBold" pitchFamily="34" charset="-122"/>
-                <a:cs typeface="Poppins SemiBold" pitchFamily="34" charset="-120"/>
+                <a:latin typeface="Poppins" pitchFamily="34" charset="0"/>
+                <a:ea typeface="Poppins" pitchFamily="34" charset="-122"/>
+                <a:cs typeface="Poppins" pitchFamily="34" charset="-120"/>
               </a:rPr>
               <a:t>PART 03 · COLLATERAL</a:t>
             </a:r>
@@ -4173,13 +4173,13 @@
               <a:buNone/>
             </a:pPr>
             <a:r>
-              <a:rPr lang="en-US" sz="4200" dirty="0">
+              <a:rPr lang="en-US" sz="4200" b="1" dirty="0">
                 <a:solidFill>
                   <a:srgbClr val="111111"/>
                 </a:solidFill>
-                <a:latin typeface="Poppins SemiBold" pitchFamily="34" charset="0"/>
-                <a:ea typeface="Poppins SemiBold" pitchFamily="34" charset="-122"/>
-                <a:cs typeface="Poppins SemiBold" pitchFamily="34" charset="-120"/>
+                <a:latin typeface="Poppins" pitchFamily="34" charset="0"/>
+                <a:ea typeface="Poppins" pitchFamily="34" charset="-122"/>
+                <a:cs typeface="Poppins" pitchFamily="34" charset="-120"/>
               </a:rPr>
               <a:t>The destination business, sold the way the venue already sells it.</a:t>
             </a:r>
@@ -4278,13 +4278,13 @@
               <a:buNone/>
             </a:pPr>
             <a:r>
-              <a:rPr lang="en-US" sz="1000" dirty="0">
+              <a:rPr lang="en-US" sz="1000" b="1" dirty="0">
                 <a:solidFill>
                   <a:srgbClr val="111111"/>
                 </a:solidFill>
-                <a:latin typeface="Poppins SemiBold" pitchFamily="34" charset="0"/>
-                <a:ea typeface="Poppins SemiBold" pitchFamily="34" charset="-122"/>
-                <a:cs typeface="Poppins SemiBold" pitchFamily="34" charset="-120"/>
+                <a:latin typeface="Poppins" pitchFamily="34" charset="0"/>
+                <a:ea typeface="Poppins" pitchFamily="34" charset="-122"/>
+                <a:cs typeface="Poppins" pitchFamily="34" charset="-120"/>
               </a:rPr>
               <a:t>Weddings</a:t>
             </a:r>
@@ -4341,13 +4341,13 @@
               <a:buNone/>
             </a:pPr>
             <a:r>
-              <a:rPr lang="en-US" sz="1000" dirty="0">
+              <a:rPr lang="en-US" sz="1000" b="1" dirty="0">
                 <a:solidFill>
                   <a:srgbClr val="111111"/>
                 </a:solidFill>
-                <a:latin typeface="Poppins SemiBold" pitchFamily="34" charset="0"/>
-                <a:ea typeface="Poppins SemiBold" pitchFamily="34" charset="-122"/>
-                <a:cs typeface="Poppins SemiBold" pitchFamily="34" charset="-120"/>
+                <a:latin typeface="Poppins" pitchFamily="34" charset="0"/>
+                <a:ea typeface="Poppins" pitchFamily="34" charset="-122"/>
+                <a:cs typeface="Poppins" pitchFamily="34" charset="-120"/>
               </a:rPr>
               <a:t>Bucks and hens</a:t>
             </a:r>
@@ -4404,13 +4404,13 @@
               <a:buNone/>
             </a:pPr>
             <a:r>
-              <a:rPr lang="en-US" sz="1000" dirty="0">
+              <a:rPr lang="en-US" sz="1000" b="1" dirty="0">
                 <a:solidFill>
                   <a:srgbClr val="111111"/>
                 </a:solidFill>
-                <a:latin typeface="Poppins SemiBold" pitchFamily="34" charset="0"/>
-                <a:ea typeface="Poppins SemiBold" pitchFamily="34" charset="-122"/>
-                <a:cs typeface="Poppins SemiBold" pitchFamily="34" charset="-120"/>
+                <a:latin typeface="Poppins" pitchFamily="34" charset="0"/>
+                <a:ea typeface="Poppins" pitchFamily="34" charset="-122"/>
+                <a:cs typeface="Poppins" pitchFamily="34" charset="-120"/>
               </a:rPr>
               <a:t>Work functions</a:t>
             </a:r>
@@ -4467,13 +4467,13 @@
               <a:buNone/>
             </a:pPr>
             <a:r>
-              <a:rPr lang="en-US" sz="1000" dirty="0">
+              <a:rPr lang="en-US" sz="1000" b="1" dirty="0">
                 <a:solidFill>
                   <a:srgbClr val="111111"/>
                 </a:solidFill>
-                <a:latin typeface="Poppins SemiBold" pitchFamily="34" charset="0"/>
-                <a:ea typeface="Poppins SemiBold" pitchFamily="34" charset="-122"/>
-                <a:cs typeface="Poppins SemiBold" pitchFamily="34" charset="-120"/>
+                <a:latin typeface="Poppins" pitchFamily="34" charset="0"/>
+                <a:ea typeface="Poppins" pitchFamily="34" charset="-122"/>
+                <a:cs typeface="Poppins" pitchFamily="34" charset="-120"/>
               </a:rPr>
               <a:t>Tours and tastings</a:t>
             </a:r>
@@ -4538,13 +4538,13 @@
               <a:buNone/>
             </a:pPr>
             <a:r>
-              <a:rPr lang="en-US" sz="900" spc="200" kern="0" dirty="0">
+              <a:rPr lang="en-US" sz="900" b="1" spc="200" kern="0" dirty="0">
                 <a:solidFill>
                   <a:srgbClr val="111111"/>
                 </a:solidFill>
-                <a:latin typeface="Poppins SemiBold" pitchFamily="34" charset="0"/>
-                <a:ea typeface="Poppins SemiBold" pitchFamily="34" charset="-122"/>
-                <a:cs typeface="Poppins SemiBold" pitchFamily="34" charset="-120"/>
+                <a:latin typeface="Poppins" pitchFamily="34" charset="0"/>
+                <a:ea typeface="Poppins" pitchFamily="34" charset="-122"/>
+                <a:cs typeface="Poppins" pitchFamily="34" charset="-120"/>
               </a:rPr>
               <a:t>PART 03 · COLLATERAL</a:t>
             </a:r>
@@ -4580,13 +4580,13 @@
               <a:buNone/>
             </a:pPr>
             <a:r>
-              <a:rPr lang="en-US" sz="4200" dirty="0">
+              <a:rPr lang="en-US" sz="4200" b="1" dirty="0">
                 <a:solidFill>
                   <a:srgbClr val="111111"/>
                 </a:solidFill>
-                <a:latin typeface="Poppins SemiBold" pitchFamily="34" charset="0"/>
-                <a:ea typeface="Poppins SemiBold" pitchFamily="34" charset="-122"/>
-                <a:cs typeface="Poppins SemiBold" pitchFamily="34" charset="-120"/>
+                <a:latin typeface="Poppins" pitchFamily="34" charset="0"/>
+                <a:ea typeface="Poppins" pitchFamily="34" charset="-122"/>
+                <a:cs typeface="Poppins" pitchFamily="34" charset="-120"/>
               </a:rPr>
               <a:t>Turning hens and bucks days into wedding day volume.</a:t>
             </a:r>
@@ -4643,13 +4643,13 @@
               <a:buNone/>
             </a:pPr>
             <a:r>
-              <a:rPr lang="en-US" sz="1000" dirty="0">
+              <a:rPr lang="en-US" sz="1000" b="1" dirty="0">
                 <a:solidFill>
                   <a:srgbClr val="111111"/>
                 </a:solidFill>
-                <a:latin typeface="Poppins SemiBold" pitchFamily="34" charset="0"/>
-                <a:ea typeface="Poppins SemiBold" pitchFamily="34" charset="-122"/>
-                <a:cs typeface="Poppins SemiBold" pitchFamily="34" charset="-120"/>
+                <a:latin typeface="Poppins" pitchFamily="34" charset="0"/>
+                <a:ea typeface="Poppins" pitchFamily="34" charset="-122"/>
+                <a:cs typeface="Poppins" pitchFamily="34" charset="-120"/>
               </a:rPr>
               <a:t>The artwork, ready to send</a:t>
             </a:r>
@@ -4705,13 +4705,13 @@
               <a:buNone/>
             </a:pPr>
             <a:r>
-              <a:rPr lang="en-US" sz="1600" dirty="0">
+              <a:rPr lang="en-US" sz="1600" b="1" dirty="0">
                 <a:solidFill>
                   <a:srgbClr val="666666"/>
                 </a:solidFill>
-                <a:latin typeface="Poppins SemiBold" pitchFamily="34" charset="0"/>
-                <a:ea typeface="Poppins SemiBold" pitchFamily="34" charset="-122"/>
-                <a:cs typeface="Poppins SemiBold" pitchFamily="34" charset="-120"/>
+                <a:latin typeface="Poppins" pitchFamily="34" charset="0"/>
+                <a:ea typeface="Poppins" pitchFamily="34" charset="-122"/>
+                <a:cs typeface="Poppins" pitchFamily="34" charset="-120"/>
               </a:rPr>
               <a:t>01</a:t>
             </a:r>
@@ -4744,13 +4744,13 @@
               <a:buNone/>
             </a:pPr>
             <a:r>
-              <a:rPr lang="en-US" sz="1300" dirty="0">
+              <a:rPr lang="en-US" sz="1300" b="1" dirty="0">
                 <a:solidFill>
                   <a:srgbClr val="111111"/>
                 </a:solidFill>
-                <a:latin typeface="Poppins SemiBold" pitchFamily="34" charset="0"/>
-                <a:ea typeface="Poppins SemiBold" pitchFamily="34" charset="-122"/>
-                <a:cs typeface="Poppins SemiBold" pitchFamily="34" charset="-120"/>
+                <a:latin typeface="Poppins" pitchFamily="34" charset="0"/>
+                <a:ea typeface="Poppins" pitchFamily="34" charset="-122"/>
+                <a:cs typeface="Poppins" pitchFamily="34" charset="-120"/>
               </a:rPr>
               <a:t>The Tap Room event</a:t>
             </a:r>
@@ -4848,13 +4848,13 @@
               <a:buNone/>
             </a:pPr>
             <a:r>
-              <a:rPr lang="en-US" sz="1600" dirty="0">
+              <a:rPr lang="en-US" sz="1600" b="1" dirty="0">
                 <a:solidFill>
                   <a:srgbClr val="666666"/>
                 </a:solidFill>
-                <a:latin typeface="Poppins SemiBold" pitchFamily="34" charset="0"/>
-                <a:ea typeface="Poppins SemiBold" pitchFamily="34" charset="-122"/>
-                <a:cs typeface="Poppins SemiBold" pitchFamily="34" charset="-120"/>
+                <a:latin typeface="Poppins" pitchFamily="34" charset="0"/>
+                <a:ea typeface="Poppins" pitchFamily="34" charset="-122"/>
+                <a:cs typeface="Poppins" pitchFamily="34" charset="-120"/>
               </a:rPr>
               <a:t>02</a:t>
             </a:r>
@@ -4887,13 +4887,13 @@
               <a:buNone/>
             </a:pPr>
             <a:r>
-              <a:rPr lang="en-US" sz="1300" dirty="0">
+              <a:rPr lang="en-US" sz="1300" b="1" dirty="0">
                 <a:solidFill>
                   <a:srgbClr val="111111"/>
                 </a:solidFill>
-                <a:latin typeface="Poppins SemiBold" pitchFamily="34" charset="0"/>
-                <a:ea typeface="Poppins SemiBold" pitchFamily="34" charset="-122"/>
-                <a:cs typeface="Poppins SemiBold" pitchFamily="34" charset="-120"/>
+                <a:latin typeface="Poppins" pitchFamily="34" charset="0"/>
+                <a:ea typeface="Poppins" pitchFamily="34" charset="-122"/>
+                <a:cs typeface="Poppins" pitchFamily="34" charset="-120"/>
               </a:rPr>
               <a:t>Bespoke branding</a:t>
             </a:r>
@@ -4991,13 +4991,13 @@
               <a:buNone/>
             </a:pPr>
             <a:r>
-              <a:rPr lang="en-US" sz="1600" dirty="0">
+              <a:rPr lang="en-US" sz="1600" b="1" dirty="0">
                 <a:solidFill>
                   <a:srgbClr val="666666"/>
                 </a:solidFill>
-                <a:latin typeface="Poppins SemiBold" pitchFamily="34" charset="0"/>
-                <a:ea typeface="Poppins SemiBold" pitchFamily="34" charset="-122"/>
-                <a:cs typeface="Poppins SemiBold" pitchFamily="34" charset="-120"/>
+                <a:latin typeface="Poppins" pitchFamily="34" charset="0"/>
+                <a:ea typeface="Poppins" pitchFamily="34" charset="-122"/>
+                <a:cs typeface="Poppins" pitchFamily="34" charset="-120"/>
               </a:rPr>
               <a:t>03</a:t>
             </a:r>
@@ -5030,13 +5030,13 @@
               <a:buNone/>
             </a:pPr>
             <a:r>
-              <a:rPr lang="en-US" sz="1300" dirty="0">
+              <a:rPr lang="en-US" sz="1300" b="1" dirty="0">
                 <a:solidFill>
                   <a:srgbClr val="111111"/>
                 </a:solidFill>
-                <a:latin typeface="Poppins SemiBold" pitchFamily="34" charset="0"/>
-                <a:ea typeface="Poppins SemiBold" pitchFamily="34" charset="-122"/>
-                <a:cs typeface="Poppins SemiBold" pitchFamily="34" charset="-120"/>
+                <a:latin typeface="Poppins" pitchFamily="34" charset="0"/>
+                <a:ea typeface="Poppins" pitchFamily="34" charset="-122"/>
+                <a:cs typeface="Poppins" pitchFamily="34" charset="-120"/>
               </a:rPr>
               <a:t>Wedding day reception</a:t>
             </a:r>
@@ -5134,13 +5134,13 @@
               <a:buNone/>
             </a:pPr>
             <a:r>
-              <a:rPr lang="en-US" sz="1600" dirty="0">
+              <a:rPr lang="en-US" sz="1600" b="1" dirty="0">
                 <a:solidFill>
                   <a:srgbClr val="666666"/>
                 </a:solidFill>
-                <a:latin typeface="Poppins SemiBold" pitchFamily="34" charset="0"/>
-                <a:ea typeface="Poppins SemiBold" pitchFamily="34" charset="-122"/>
-                <a:cs typeface="Poppins SemiBold" pitchFamily="34" charset="-120"/>
+                <a:latin typeface="Poppins" pitchFamily="34" charset="0"/>
+                <a:ea typeface="Poppins" pitchFamily="34" charset="-122"/>
+                <a:cs typeface="Poppins" pitchFamily="34" charset="-120"/>
               </a:rPr>
               <a:t>04</a:t>
             </a:r>
@@ -5173,13 +5173,13 @@
               <a:buNone/>
             </a:pPr>
             <a:r>
-              <a:rPr lang="en-US" sz="1300" dirty="0">
+              <a:rPr lang="en-US" sz="1300" b="1" dirty="0">
                 <a:solidFill>
                   <a:srgbClr val="111111"/>
                 </a:solidFill>
-                <a:latin typeface="Poppins SemiBold" pitchFamily="34" charset="0"/>
-                <a:ea typeface="Poppins SemiBold" pitchFamily="34" charset="-122"/>
-                <a:cs typeface="Poppins SemiBold" pitchFamily="34" charset="-120"/>
+                <a:latin typeface="Poppins" pitchFamily="34" charset="0"/>
+                <a:ea typeface="Poppins" pitchFamily="34" charset="-122"/>
+                <a:cs typeface="Poppins" pitchFamily="34" charset="-120"/>
               </a:rPr>
               <a:t>Take-home compound</a:t>
             </a:r>
@@ -5277,13 +5277,13 @@
               <a:buNone/>
             </a:pPr>
             <a:r>
-              <a:rPr lang="en-US" sz="900" spc="200" kern="0" dirty="0">
+              <a:rPr lang="en-US" sz="900" b="1" spc="200" kern="0" dirty="0">
                 <a:solidFill>
                   <a:srgbClr val="111111"/>
                 </a:solidFill>
-                <a:latin typeface="Poppins SemiBold" pitchFamily="34" charset="0"/>
-                <a:ea typeface="Poppins SemiBold" pitchFamily="34" charset="-122"/>
-                <a:cs typeface="Poppins SemiBold" pitchFamily="34" charset="-120"/>
+                <a:latin typeface="Poppins" pitchFamily="34" charset="0"/>
+                <a:ea typeface="Poppins" pitchFamily="34" charset="-122"/>
+                <a:cs typeface="Poppins" pitchFamily="34" charset="-120"/>
               </a:rPr>
               <a:t>THE COMPOUND EFFECT</a:t>
             </a:r>
@@ -5390,13 +5390,13 @@
               <a:buNone/>
             </a:pPr>
             <a:r>
-              <a:rPr lang="en-US" sz="900" spc="200" kern="0" dirty="0">
+              <a:rPr lang="en-US" sz="900" b="1" spc="200" kern="0" dirty="0">
                 <a:solidFill>
                   <a:srgbClr val="111111"/>
                 </a:solidFill>
-                <a:latin typeface="Poppins SemiBold" pitchFamily="34" charset="0"/>
-                <a:ea typeface="Poppins SemiBold" pitchFamily="34" charset="-122"/>
-                <a:cs typeface="Poppins SemiBold" pitchFamily="34" charset="-120"/>
+                <a:latin typeface="Poppins" pitchFamily="34" charset="0"/>
+                <a:ea typeface="Poppins" pitchFamily="34" charset="-122"/>
+                <a:cs typeface="Poppins" pitchFamily="34" charset="-120"/>
               </a:rPr>
               <a:t>PART 03 · COLLATERAL</a:t>
             </a:r>
@@ -5432,13 +5432,13 @@
               <a:buNone/>
             </a:pPr>
             <a:r>
-              <a:rPr lang="en-US" sz="4200" dirty="0">
+              <a:rPr lang="en-US" sz="4200" b="1" dirty="0">
                 <a:solidFill>
                   <a:srgbClr val="111111"/>
                 </a:solidFill>
-                <a:latin typeface="Poppins SemiBold" pitchFamily="34" charset="0"/>
-                <a:ea typeface="Poppins SemiBold" pitchFamily="34" charset="-122"/>
-                <a:cs typeface="Poppins SemiBold" pitchFamily="34" charset="-120"/>
+                <a:latin typeface="Poppins" pitchFamily="34" charset="0"/>
+                <a:ea typeface="Poppins" pitchFamily="34" charset="-122"/>
+                <a:cs typeface="Poppins" pitchFamily="34" charset="-120"/>
               </a:rPr>
               <a:t>What a co-branded system could look like.</a:t>
             </a:r>
@@ -5494,13 +5494,13 @@
               <a:buNone/>
             </a:pPr>
             <a:r>
-              <a:rPr lang="en-US" sz="1000" dirty="0">
+              <a:rPr lang="en-US" sz="1000" b="1" dirty="0">
                 <a:solidFill>
                   <a:srgbClr val="111111"/>
                 </a:solidFill>
-                <a:latin typeface="Poppins SemiBold" pitchFamily="34" charset="0"/>
-                <a:ea typeface="Poppins SemiBold" pitchFamily="34" charset="-122"/>
-                <a:cs typeface="Poppins SemiBold" pitchFamily="34" charset="-120"/>
+                <a:latin typeface="Poppins" pitchFamily="34" charset="0"/>
+                <a:ea typeface="Poppins" pitchFamily="34" charset="-122"/>
+                <a:cs typeface="Poppins" pitchFamily="34" charset="-120"/>
               </a:rPr>
               <a:t>Trade and worksite</a:t>
             </a:r>
@@ -5556,13 +5556,13 @@
               <a:buNone/>
             </a:pPr>
             <a:r>
-              <a:rPr lang="en-US" sz="1000" dirty="0">
+              <a:rPr lang="en-US" sz="1000" b="1" dirty="0">
                 <a:solidFill>
                   <a:srgbClr val="111111"/>
                 </a:solidFill>
-                <a:latin typeface="Poppins SemiBold" pitchFamily="34" charset="0"/>
-                <a:ea typeface="Poppins SemiBold" pitchFamily="34" charset="-122"/>
-                <a:cs typeface="Poppins SemiBold" pitchFamily="34" charset="-120"/>
+                <a:latin typeface="Poppins" pitchFamily="34" charset="0"/>
+                <a:ea typeface="Poppins" pitchFamily="34" charset="-122"/>
+                <a:cs typeface="Poppins" pitchFamily="34" charset="-120"/>
               </a:rPr>
               <a:t>Four-wheel drive and touring</a:t>
             </a:r>
@@ -5618,13 +5618,13 @@
               <a:buNone/>
             </a:pPr>
             <a:r>
-              <a:rPr lang="en-US" sz="1000" dirty="0">
+              <a:rPr lang="en-US" sz="1000" b="1" dirty="0">
                 <a:solidFill>
                   <a:srgbClr val="111111"/>
                 </a:solidFill>
-                <a:latin typeface="Poppins SemiBold" pitchFamily="34" charset="0"/>
-                <a:ea typeface="Poppins SemiBold" pitchFamily="34" charset="-122"/>
-                <a:cs typeface="Poppins SemiBold" pitchFamily="34" charset="-120"/>
+                <a:latin typeface="Poppins" pitchFamily="34" charset="0"/>
+                <a:ea typeface="Poppins" pitchFamily="34" charset="-122"/>
+                <a:cs typeface="Poppins" pitchFamily="34" charset="-120"/>
               </a:rPr>
               <a:t>Motorcycle clubs</a:t>
             </a:r>
@@ -5680,13 +5680,13 @@
               <a:buNone/>
             </a:pPr>
             <a:r>
-              <a:rPr lang="en-US" sz="1000" dirty="0">
+              <a:rPr lang="en-US" sz="1000" b="1" dirty="0">
                 <a:solidFill>
                   <a:srgbClr val="111111"/>
                 </a:solidFill>
-                <a:latin typeface="Poppins SemiBold" pitchFamily="34" charset="0"/>
-                <a:ea typeface="Poppins SemiBold" pitchFamily="34" charset="-122"/>
-                <a:cs typeface="Poppins SemiBold" pitchFamily="34" charset="-120"/>
+                <a:latin typeface="Poppins" pitchFamily="34" charset="0"/>
+                <a:ea typeface="Poppins" pitchFamily="34" charset="-122"/>
+                <a:cs typeface="Poppins" pitchFamily="34" charset="-120"/>
               </a:rPr>
               <a:t>Mobile bar for events</a:t>
             </a:r>
@@ -5840,13 +5840,13 @@
               <a:buNone/>
             </a:pPr>
             <a:r>
-              <a:rPr lang="en-US" sz="1400" spc="300" kern="0" dirty="0">
+              <a:rPr lang="en-US" sz="1400" b="1" spc="300" kern="0" dirty="0">
                 <a:solidFill>
                   <a:srgbClr val="FAF8F4"/>
                 </a:solidFill>
-                <a:latin typeface="Poppins SemiBold" pitchFamily="34" charset="0"/>
-                <a:ea typeface="Poppins SemiBold" pitchFamily="34" charset="-122"/>
-                <a:cs typeface="Poppins SemiBold" pitchFamily="34" charset="-120"/>
+                <a:latin typeface="Poppins" pitchFamily="34" charset="0"/>
+                <a:ea typeface="Poppins" pitchFamily="34" charset="-122"/>
+                <a:cs typeface="Poppins" pitchFamily="34" charset="-120"/>
               </a:rPr>
               <a:t>PART 04</a:t>
             </a:r>
@@ -5879,13 +5879,13 @@
               <a:buNone/>
             </a:pPr>
             <a:r>
-              <a:rPr lang="en-US" sz="12000" dirty="0">
+              <a:rPr lang="en-US" sz="12000" b="1" dirty="0">
                 <a:solidFill>
                   <a:srgbClr val="FAF8F4"/>
                 </a:solidFill>
-                <a:latin typeface="Poppins SemiBold" pitchFamily="34" charset="0"/>
-                <a:ea typeface="Poppins SemiBold" pitchFamily="34" charset="-122"/>
-                <a:cs typeface="Poppins SemiBold" pitchFamily="34" charset="-120"/>
+                <a:latin typeface="Poppins" pitchFamily="34" charset="0"/>
+                <a:ea typeface="Poppins" pitchFamily="34" charset="-122"/>
+                <a:cs typeface="Poppins" pitchFamily="34" charset="-120"/>
               </a:rPr>
               <a:t>Execution.</a:t>
             </a:r>
@@ -5918,13 +5918,13 @@
               <a:buNone/>
             </a:pPr>
             <a:r>
-              <a:rPr lang="en-US" sz="1600" dirty="0">
+              <a:rPr lang="en-US" sz="1600" b="1" dirty="0">
                 <a:solidFill>
                   <a:srgbClr val="FAF8F4"/>
                 </a:solidFill>
-                <a:latin typeface="Poppins SemiBold" pitchFamily="34" charset="0"/>
-                <a:ea typeface="Poppins SemiBold" pitchFamily="34" charset="-122"/>
-                <a:cs typeface="Poppins SemiBold" pitchFamily="34" charset="-120"/>
+                <a:latin typeface="Poppins" pitchFamily="34" charset="0"/>
+                <a:ea typeface="Poppins" pitchFamily="34" charset="-122"/>
+                <a:cs typeface="Poppins" pitchFamily="34" charset="-120"/>
               </a:rPr>
               <a:t>The small fixes, and where we can help.</a:t>
             </a:r>
@@ -5989,13 +5989,13 @@
               <a:buNone/>
             </a:pPr>
             <a:r>
-              <a:rPr lang="en-US" sz="900" spc="200" kern="0" dirty="0">
+              <a:rPr lang="en-US" sz="900" b="1" spc="200" kern="0" dirty="0">
                 <a:solidFill>
                   <a:srgbClr val="111111"/>
                 </a:solidFill>
-                <a:latin typeface="Poppins SemiBold" pitchFamily="34" charset="0"/>
-                <a:ea typeface="Poppins SemiBold" pitchFamily="34" charset="-122"/>
-                <a:cs typeface="Poppins SemiBold" pitchFamily="34" charset="-120"/>
+                <a:latin typeface="Poppins" pitchFamily="34" charset="0"/>
+                <a:ea typeface="Poppins" pitchFamily="34" charset="-122"/>
+                <a:cs typeface="Poppins" pitchFamily="34" charset="-120"/>
               </a:rPr>
               <a:t>PART 04 · EXECUTION</a:t>
             </a:r>
@@ -6031,13 +6031,13 @@
               <a:buNone/>
             </a:pPr>
             <a:r>
-              <a:rPr lang="en-US" sz="4200" dirty="0">
+              <a:rPr lang="en-US" sz="4200" b="1" dirty="0">
                 <a:solidFill>
                   <a:srgbClr val="111111"/>
                 </a:solidFill>
-                <a:latin typeface="Poppins SemiBold" pitchFamily="34" charset="0"/>
-                <a:ea typeface="Poppins SemiBold" pitchFamily="34" charset="-122"/>
-                <a:cs typeface="Poppins SemiBold" pitchFamily="34" charset="-120"/>
+                <a:latin typeface="Poppins" pitchFamily="34" charset="0"/>
+                <a:ea typeface="Poppins" pitchFamily="34" charset="-122"/>
+                <a:cs typeface="Poppins" pitchFamily="34" charset="-120"/>
               </a:rPr>
               <a:t>Small fixes, disproportionate impact.</a:t>
             </a:r>
@@ -6093,13 +6093,13 @@
               <a:buNone/>
             </a:pPr>
             <a:r>
-              <a:rPr lang="en-US" sz="1400" dirty="0">
+              <a:rPr lang="en-US" sz="1400" b="1" dirty="0">
                 <a:solidFill>
                   <a:srgbClr val="111111"/>
                 </a:solidFill>
-                <a:latin typeface="Poppins SemiBold" pitchFamily="34" charset="0"/>
-                <a:ea typeface="Poppins SemiBold" pitchFamily="34" charset="-122"/>
-                <a:cs typeface="Poppins SemiBold" pitchFamily="34" charset="-120"/>
+                <a:latin typeface="Poppins" pitchFamily="34" charset="0"/>
+                <a:ea typeface="Poppins" pitchFamily="34" charset="-122"/>
+                <a:cs typeface="Poppins" pitchFamily="34" charset="-120"/>
               </a:rPr>
               <a:t>Above the fold</a:t>
             </a:r>
@@ -6197,13 +6197,13 @@
               <a:buNone/>
             </a:pPr>
             <a:r>
-              <a:rPr lang="en-US" sz="1400" dirty="0">
+              <a:rPr lang="en-US" sz="1400" b="1" dirty="0">
                 <a:solidFill>
                   <a:srgbClr val="111111"/>
                 </a:solidFill>
-                <a:latin typeface="Poppins SemiBold" pitchFamily="34" charset="0"/>
-                <a:ea typeface="Poppins SemiBold" pitchFamily="34" charset="-122"/>
-                <a:cs typeface="Poppins SemiBold" pitchFamily="34" charset="-120"/>
+                <a:latin typeface="Poppins" pitchFamily="34" charset="0"/>
+                <a:ea typeface="Poppins" pitchFamily="34" charset="-122"/>
+                <a:cs typeface="Poppins" pitchFamily="34" charset="-120"/>
               </a:rPr>
               <a:t>Missing proof</a:t>
             </a:r>
@@ -6301,13 +6301,13 @@
               <a:buNone/>
             </a:pPr>
             <a:r>
-              <a:rPr lang="en-US" sz="1400" dirty="0">
+              <a:rPr lang="en-US" sz="1400" b="1" dirty="0">
                 <a:solidFill>
                   <a:srgbClr val="111111"/>
                 </a:solidFill>
-                <a:latin typeface="Poppins SemiBold" pitchFamily="34" charset="0"/>
-                <a:ea typeface="Poppins SemiBold" pitchFamily="34" charset="-122"/>
-                <a:cs typeface="Poppins SemiBold" pitchFamily="34" charset="-120"/>
+                <a:latin typeface="Poppins" pitchFamily="34" charset="0"/>
+                <a:ea typeface="Poppins" pitchFamily="34" charset="-122"/>
+                <a:cs typeface="Poppins" pitchFamily="34" charset="-120"/>
               </a:rPr>
               <a:t>Hierarchy</a:t>
             </a:r>
@@ -6405,13 +6405,13 @@
               <a:buNone/>
             </a:pPr>
             <a:r>
-              <a:rPr lang="en-US" sz="1400" dirty="0">
+              <a:rPr lang="en-US" sz="1400" b="1" dirty="0">
                 <a:solidFill>
                   <a:srgbClr val="111111"/>
                 </a:solidFill>
-                <a:latin typeface="Poppins SemiBold" pitchFamily="34" charset="0"/>
-                <a:ea typeface="Poppins SemiBold" pitchFamily="34" charset="-122"/>
-                <a:cs typeface="Poppins SemiBold" pitchFamily="34" charset="-120"/>
+                <a:latin typeface="Poppins" pitchFamily="34" charset="0"/>
+                <a:ea typeface="Poppins" pitchFamily="34" charset="-122"/>
+                <a:cs typeface="Poppins" pitchFamily="34" charset="-120"/>
               </a:rPr>
               <a:t>Category</a:t>
             </a:r>
@@ -6509,13 +6509,13 @@
               <a:buNone/>
             </a:pPr>
             <a:r>
-              <a:rPr lang="en-US" sz="1400" dirty="0">
+              <a:rPr lang="en-US" sz="1400" b="1" dirty="0">
                 <a:solidFill>
                   <a:srgbClr val="111111"/>
                 </a:solidFill>
-                <a:latin typeface="Poppins SemiBold" pitchFamily="34" charset="0"/>
-                <a:ea typeface="Poppins SemiBold" pitchFamily="34" charset="-122"/>
-                <a:cs typeface="Poppins SemiBold" pitchFamily="34" charset="-120"/>
+                <a:latin typeface="Poppins" pitchFamily="34" charset="0"/>
+                <a:ea typeface="Poppins" pitchFamily="34" charset="-122"/>
+                <a:cs typeface="Poppins" pitchFamily="34" charset="-120"/>
               </a:rPr>
               <a:t>Channel language</a:t>
             </a:r>
@@ -6645,13 +6645,13 @@
               <a:buNone/>
             </a:pPr>
             <a:r>
-              <a:rPr lang="en-US" sz="900" spc="200" kern="0" dirty="0">
+              <a:rPr lang="en-US" sz="900" b="1" spc="200" kern="0" dirty="0">
                 <a:solidFill>
                   <a:srgbClr val="111111"/>
                 </a:solidFill>
-                <a:latin typeface="Poppins SemiBold" pitchFamily="34" charset="0"/>
-                <a:ea typeface="Poppins SemiBold" pitchFamily="34" charset="-122"/>
-                <a:cs typeface="Poppins SemiBold" pitchFamily="34" charset="-120"/>
+                <a:latin typeface="Poppins" pitchFamily="34" charset="0"/>
+                <a:ea typeface="Poppins" pitchFamily="34" charset="-122"/>
+                <a:cs typeface="Poppins" pitchFamily="34" charset="-120"/>
               </a:rPr>
               <a:t>PART 04 · EXECUTION</a:t>
             </a:r>
@@ -6687,13 +6687,13 @@
               <a:buNone/>
             </a:pPr>
             <a:r>
-              <a:rPr lang="en-US" sz="4200" dirty="0">
+              <a:rPr lang="en-US" sz="4200" b="1" dirty="0">
                 <a:solidFill>
                   <a:srgbClr val="111111"/>
                 </a:solidFill>
-                <a:latin typeface="Poppins SemiBold" pitchFamily="34" charset="0"/>
-                <a:ea typeface="Poppins SemiBold" pitchFamily="34" charset="-122"/>
-                <a:cs typeface="Poppins SemiBold" pitchFamily="34" charset="-120"/>
+                <a:latin typeface="Poppins" pitchFamily="34" charset="0"/>
+                <a:ea typeface="Poppins" pitchFamily="34" charset="-122"/>
+                <a:cs typeface="Poppins" pitchFamily="34" charset="-120"/>
               </a:rPr>
               <a:t>What we can pick up from here.</a:t>
             </a:r>
@@ -6726,13 +6726,13 @@
               <a:buNone/>
             </a:pPr>
             <a:r>
-              <a:rPr lang="en-US" sz="900" spc="200" kern="0" dirty="0">
+              <a:rPr lang="en-US" sz="900" b="1" spc="200" kern="0" dirty="0">
                 <a:solidFill>
                   <a:srgbClr val="111111"/>
                 </a:solidFill>
-                <a:latin typeface="Poppins SemiBold" pitchFamily="34" charset="0"/>
-                <a:ea typeface="Poppins SemiBold" pitchFamily="34" charset="-122"/>
-                <a:cs typeface="Poppins SemiBold" pitchFamily="34" charset="-120"/>
+                <a:latin typeface="Poppins" pitchFamily="34" charset="0"/>
+                <a:ea typeface="Poppins" pitchFamily="34" charset="-122"/>
+                <a:cs typeface="Poppins" pitchFamily="34" charset="-120"/>
               </a:rPr>
               <a:t>FROM THE BRIEF</a:t>
             </a:r>
@@ -7178,13 +7178,13 @@
               <a:buNone/>
             </a:pPr>
             <a:r>
-              <a:rPr lang="en-US" sz="900" spc="200" kern="0" dirty="0">
+              <a:rPr lang="en-US" sz="900" b="1" spc="200" kern="0" dirty="0">
                 <a:solidFill>
                   <a:srgbClr val="111111"/>
                 </a:solidFill>
-                <a:latin typeface="Poppins SemiBold" pitchFamily="34" charset="0"/>
-                <a:ea typeface="Poppins SemiBold" pitchFamily="34" charset="-122"/>
-                <a:cs typeface="Poppins SemiBold" pitchFamily="34" charset="-120"/>
+                <a:latin typeface="Poppins" pitchFamily="34" charset="0"/>
+                <a:ea typeface="Poppins" pitchFamily="34" charset="-122"/>
+                <a:cs typeface="Poppins" pitchFamily="34" charset="-120"/>
               </a:rPr>
               <a:t>ALSO WORTH ADDING</a:t>
             </a:r>
@@ -7532,13 +7532,13 @@
               <a:buNone/>
             </a:pPr>
             <a:r>
-              <a:rPr lang="en-US" sz="12000" dirty="0">
+              <a:rPr lang="en-US" sz="12000" b="1" dirty="0">
                 <a:solidFill>
                   <a:srgbClr val="111111"/>
                 </a:solidFill>
-                <a:latin typeface="Poppins SemiBold" pitchFamily="34" charset="0"/>
-                <a:ea typeface="Poppins SemiBold" pitchFamily="34" charset="-122"/>
-                <a:cs typeface="Poppins SemiBold" pitchFamily="34" charset="-120"/>
+                <a:latin typeface="Poppins" pitchFamily="34" charset="0"/>
+                <a:ea typeface="Poppins" pitchFamily="34" charset="-122"/>
+                <a:cs typeface="Poppins" pitchFamily="34" charset="-120"/>
               </a:rPr>
               <a:t>Next.</a:t>
             </a:r>
@@ -7705,13 +7705,13 @@
               <a:buNone/>
             </a:pPr>
             <a:r>
-              <a:rPr lang="en-US" sz="1400" spc="300" kern="0" dirty="0">
+              <a:rPr lang="en-US" sz="1400" b="1" spc="300" kern="0" dirty="0">
                 <a:solidFill>
                   <a:srgbClr val="FAF8F4"/>
                 </a:solidFill>
-                <a:latin typeface="Poppins SemiBold" pitchFamily="34" charset="0"/>
-                <a:ea typeface="Poppins SemiBold" pitchFamily="34" charset="-122"/>
-                <a:cs typeface="Poppins SemiBold" pitchFamily="34" charset="-120"/>
+                <a:latin typeface="Poppins" pitchFamily="34" charset="0"/>
+                <a:ea typeface="Poppins" pitchFamily="34" charset="-122"/>
+                <a:cs typeface="Poppins" pitchFamily="34" charset="-120"/>
               </a:rPr>
               <a:t>PART 01</a:t>
             </a:r>
@@ -7744,13 +7744,13 @@
               <a:buNone/>
             </a:pPr>
             <a:r>
-              <a:rPr lang="en-US" sz="12000" dirty="0">
+              <a:rPr lang="en-US" sz="12000" b="1" dirty="0">
                 <a:solidFill>
                   <a:srgbClr val="FAF8F4"/>
                 </a:solidFill>
-                <a:latin typeface="Poppins SemiBold" pitchFamily="34" charset="0"/>
-                <a:ea typeface="Poppins SemiBold" pitchFamily="34" charset="-122"/>
-                <a:cs typeface="Poppins SemiBold" pitchFamily="34" charset="-120"/>
+                <a:latin typeface="Poppins" pitchFamily="34" charset="0"/>
+                <a:ea typeface="Poppins" pitchFamily="34" charset="-122"/>
+                <a:cs typeface="Poppins" pitchFamily="34" charset="-120"/>
               </a:rPr>
               <a:t>Context.</a:t>
             </a:r>
@@ -7783,13 +7783,13 @@
               <a:buNone/>
             </a:pPr>
             <a:r>
-              <a:rPr lang="en-US" sz="1600" dirty="0">
+              <a:rPr lang="en-US" sz="1600" b="1" dirty="0">
                 <a:solidFill>
                   <a:srgbClr val="FAF8F4"/>
                 </a:solidFill>
-                <a:latin typeface="Poppins SemiBold" pitchFamily="34" charset="0"/>
-                <a:ea typeface="Poppins SemiBold" pitchFamily="34" charset="-122"/>
-                <a:cs typeface="Poppins SemiBold" pitchFamily="34" charset="-120"/>
+                <a:latin typeface="Poppins" pitchFamily="34" charset="0"/>
+                <a:ea typeface="Poppins" pitchFamily="34" charset="-122"/>
+                <a:cs typeface="Poppins" pitchFamily="34" charset="-120"/>
               </a:rPr>
               <a:t>What the numbers and the site visit actually say.</a:t>
             </a:r>
@@ -7854,13 +7854,13 @@
               <a:buNone/>
             </a:pPr>
             <a:r>
-              <a:rPr lang="en-US" sz="900" spc="200" kern="0" dirty="0">
+              <a:rPr lang="en-US" sz="900" b="1" spc="200" kern="0" dirty="0">
                 <a:solidFill>
                   <a:srgbClr val="111111"/>
                 </a:solidFill>
-                <a:latin typeface="Poppins SemiBold" pitchFamily="34" charset="0"/>
-                <a:ea typeface="Poppins SemiBold" pitchFamily="34" charset="-122"/>
-                <a:cs typeface="Poppins SemiBold" pitchFamily="34" charset="-120"/>
+                <a:latin typeface="Poppins" pitchFamily="34" charset="0"/>
+                <a:ea typeface="Poppins" pitchFamily="34" charset="-122"/>
+                <a:cs typeface="Poppins" pitchFamily="34" charset="-120"/>
               </a:rPr>
               <a:t>PART 01 · CONTEXT</a:t>
             </a:r>
@@ -7896,13 +7896,13 @@
               <a:buNone/>
             </a:pPr>
             <a:r>
-              <a:rPr lang="en-US" sz="4200" dirty="0">
+              <a:rPr lang="en-US" sz="4200" b="1" dirty="0">
                 <a:solidFill>
                   <a:srgbClr val="111111"/>
                 </a:solidFill>
-                <a:latin typeface="Poppins SemiBold" pitchFamily="34" charset="0"/>
-                <a:ea typeface="Poppins SemiBold" pitchFamily="34" charset="-122"/>
-                <a:cs typeface="Poppins SemiBold" pitchFamily="34" charset="-120"/>
+                <a:latin typeface="Poppins" pitchFamily="34" charset="0"/>
+                <a:ea typeface="Poppins" pitchFamily="34" charset="-122"/>
+                <a:cs typeface="Poppins" pitchFamily="34" charset="-120"/>
               </a:rPr>
               <a:t>The overall plan is sound. Focus is the part that is missing.</a:t>
             </a:r>
@@ -7958,13 +7958,13 @@
               <a:buNone/>
             </a:pPr>
             <a:r>
-              <a:rPr lang="en-US" sz="2400" dirty="0">
+              <a:rPr lang="en-US" sz="2400" b="1" dirty="0">
                 <a:solidFill>
                   <a:srgbClr val="666666"/>
                 </a:solidFill>
-                <a:latin typeface="Poppins SemiBold" pitchFamily="34" charset="0"/>
-                <a:ea typeface="Poppins SemiBold" pitchFamily="34" charset="-122"/>
-                <a:cs typeface="Poppins SemiBold" pitchFamily="34" charset="-120"/>
+                <a:latin typeface="Poppins" pitchFamily="34" charset="0"/>
+                <a:ea typeface="Poppins" pitchFamily="34" charset="-122"/>
+                <a:cs typeface="Poppins" pitchFamily="34" charset="-120"/>
               </a:rPr>
               <a:t>01</a:t>
             </a:r>
@@ -8000,13 +8000,13 @@
               <a:buNone/>
             </a:pPr>
             <a:r>
-              <a:rPr lang="en-US" sz="1500" dirty="0">
+              <a:rPr lang="en-US" sz="1500" b="1" dirty="0">
                 <a:solidFill>
                   <a:srgbClr val="111111"/>
                 </a:solidFill>
-                <a:latin typeface="Poppins SemiBold" pitchFamily="34" charset="0"/>
-                <a:ea typeface="Poppins SemiBold" pitchFamily="34" charset="-122"/>
-                <a:cs typeface="Poppins SemiBold" pitchFamily="34" charset="-120"/>
+                <a:latin typeface="Poppins" pitchFamily="34" charset="0"/>
+                <a:ea typeface="Poppins" pitchFamily="34" charset="-122"/>
+                <a:cs typeface="Poppins" pitchFamily="34" charset="-120"/>
               </a:rPr>
               <a:t>The strategy is sound. The shape is not.</a:t>
             </a:r>
@@ -8104,13 +8104,13 @@
               <a:buNone/>
             </a:pPr>
             <a:r>
-              <a:rPr lang="en-US" sz="2400" dirty="0">
+              <a:rPr lang="en-US" sz="2400" b="1" dirty="0">
                 <a:solidFill>
                   <a:srgbClr val="666666"/>
                 </a:solidFill>
-                <a:latin typeface="Poppins SemiBold" pitchFamily="34" charset="0"/>
-                <a:ea typeface="Poppins SemiBold" pitchFamily="34" charset="-122"/>
-                <a:cs typeface="Poppins SemiBold" pitchFamily="34" charset="-120"/>
+                <a:latin typeface="Poppins" pitchFamily="34" charset="0"/>
+                <a:ea typeface="Poppins" pitchFamily="34" charset="-122"/>
+                <a:cs typeface="Poppins" pitchFamily="34" charset="-120"/>
               </a:rPr>
               <a:t>02</a:t>
             </a:r>
@@ -8146,13 +8146,13 @@
               <a:buNone/>
             </a:pPr>
             <a:r>
-              <a:rPr lang="en-US" sz="1500" dirty="0">
+              <a:rPr lang="en-US" sz="1500" b="1" dirty="0">
                 <a:solidFill>
                   <a:srgbClr val="111111"/>
                 </a:solidFill>
-                <a:latin typeface="Poppins SemiBold" pitchFamily="34" charset="0"/>
-                <a:ea typeface="Poppins SemiBold" pitchFamily="34" charset="-122"/>
-                <a:cs typeface="Poppins SemiBold" pitchFamily="34" charset="-120"/>
+                <a:latin typeface="Poppins" pitchFamily="34" charset="0"/>
+                <a:ea typeface="Poppins" pitchFamily="34" charset="-122"/>
+                <a:cs typeface="Poppins" pitchFamily="34" charset="-120"/>
               </a:rPr>
               <a:t>Two business units cancelling each other out.</a:t>
             </a:r>
@@ -8250,13 +8250,13 @@
               <a:buNone/>
             </a:pPr>
             <a:r>
-              <a:rPr lang="en-US" sz="2400" dirty="0">
+              <a:rPr lang="en-US" sz="2400" b="1" dirty="0">
                 <a:solidFill>
                   <a:srgbClr val="666666"/>
                 </a:solidFill>
-                <a:latin typeface="Poppins SemiBold" pitchFamily="34" charset="0"/>
-                <a:ea typeface="Poppins SemiBold" pitchFamily="34" charset="-122"/>
-                <a:cs typeface="Poppins SemiBold" pitchFamily="34" charset="-120"/>
+                <a:latin typeface="Poppins" pitchFamily="34" charset="0"/>
+                <a:ea typeface="Poppins" pitchFamily="34" charset="-122"/>
+                <a:cs typeface="Poppins" pitchFamily="34" charset="-120"/>
               </a:rPr>
               <a:t>03</a:t>
             </a:r>
@@ -8292,13 +8292,13 @@
               <a:buNone/>
             </a:pPr>
             <a:r>
-              <a:rPr lang="en-US" sz="1500" dirty="0">
+              <a:rPr lang="en-US" sz="1500" b="1" dirty="0">
                 <a:solidFill>
                   <a:srgbClr val="111111"/>
                 </a:solidFill>
-                <a:latin typeface="Poppins SemiBold" pitchFamily="34" charset="0"/>
-                <a:ea typeface="Poppins SemiBold" pitchFamily="34" charset="-122"/>
-                <a:cs typeface="Poppins SemiBold" pitchFamily="34" charset="-120"/>
+                <a:latin typeface="Poppins" pitchFamily="34" charset="0"/>
+                <a:ea typeface="Poppins" pitchFamily="34" charset="-122"/>
+                <a:cs typeface="Poppins" pitchFamily="34" charset="-120"/>
               </a:rPr>
               <a:t>The weakest unit is getting the support.</a:t>
             </a:r>
@@ -8428,13 +8428,13 @@
               <a:buNone/>
             </a:pPr>
             <a:r>
-              <a:rPr lang="en-US" sz="900" spc="200" kern="0" dirty="0">
+              <a:rPr lang="en-US" sz="900" b="1" spc="200" kern="0" dirty="0">
                 <a:solidFill>
                   <a:srgbClr val="111111"/>
                 </a:solidFill>
-                <a:latin typeface="Poppins SemiBold" pitchFamily="34" charset="0"/>
-                <a:ea typeface="Poppins SemiBold" pitchFamily="34" charset="-122"/>
-                <a:cs typeface="Poppins SemiBold" pitchFamily="34" charset="-120"/>
+                <a:latin typeface="Poppins" pitchFamily="34" charset="0"/>
+                <a:ea typeface="Poppins" pitchFamily="34" charset="-122"/>
+                <a:cs typeface="Poppins" pitchFamily="34" charset="-120"/>
               </a:rPr>
               <a:t>PART 01 · CONTEXT</a:t>
             </a:r>
@@ -8470,13 +8470,13 @@
               <a:buNone/>
             </a:pPr>
             <a:r>
-              <a:rPr lang="en-US" sz="4200" dirty="0">
+              <a:rPr lang="en-US" sz="4200" b="1" dirty="0">
                 <a:solidFill>
                   <a:srgbClr val="111111"/>
                 </a:solidFill>
-                <a:latin typeface="Poppins SemiBold" pitchFamily="34" charset="0"/>
-                <a:ea typeface="Poppins SemiBold" pitchFamily="34" charset="-122"/>
-                <a:cs typeface="Poppins SemiBold" pitchFamily="34" charset="-120"/>
+                <a:latin typeface="Poppins" pitchFamily="34" charset="0"/>
+                <a:ea typeface="Poppins" pitchFamily="34" charset="-122"/>
+                <a:cs typeface="Poppins" pitchFamily="34" charset="-120"/>
               </a:rPr>
               <a:t>Three more, and the last one is the reason to move now.</a:t>
             </a:r>
@@ -8532,13 +8532,13 @@
               <a:buNone/>
             </a:pPr>
             <a:r>
-              <a:rPr lang="en-US" sz="2400" dirty="0">
+              <a:rPr lang="en-US" sz="2400" b="1" dirty="0">
                 <a:solidFill>
                   <a:srgbClr val="666666"/>
                 </a:solidFill>
-                <a:latin typeface="Poppins SemiBold" pitchFamily="34" charset="0"/>
-                <a:ea typeface="Poppins SemiBold" pitchFamily="34" charset="-122"/>
-                <a:cs typeface="Poppins SemiBold" pitchFamily="34" charset="-120"/>
+                <a:latin typeface="Poppins" pitchFamily="34" charset="0"/>
+                <a:ea typeface="Poppins" pitchFamily="34" charset="-122"/>
+                <a:cs typeface="Poppins" pitchFamily="34" charset="-120"/>
               </a:rPr>
               <a:t>04</a:t>
             </a:r>
@@ -8574,13 +8574,13 @@
               <a:buNone/>
             </a:pPr>
             <a:r>
-              <a:rPr lang="en-US" sz="1500" dirty="0">
+              <a:rPr lang="en-US" sz="1500" b="1" dirty="0">
                 <a:solidFill>
                   <a:srgbClr val="111111"/>
                 </a:solidFill>
-                <a:latin typeface="Poppins SemiBold" pitchFamily="34" charset="0"/>
-                <a:ea typeface="Poppins SemiBold" pitchFamily="34" charset="-122"/>
-                <a:cs typeface="Poppins SemiBold" pitchFamily="34" charset="-120"/>
+                <a:latin typeface="Poppins" pitchFamily="34" charset="0"/>
+                <a:ea typeface="Poppins" pitchFamily="34" charset="-122"/>
+                <a:cs typeface="Poppins" pitchFamily="34" charset="-120"/>
               </a:rPr>
               <a:t>The offer is good. The stars cannot shine.</a:t>
             </a:r>
@@ -8678,13 +8678,13 @@
               <a:buNone/>
             </a:pPr>
             <a:r>
-              <a:rPr lang="en-US" sz="2400" dirty="0">
+              <a:rPr lang="en-US" sz="2400" b="1" dirty="0">
                 <a:solidFill>
                   <a:srgbClr val="666666"/>
                 </a:solidFill>
-                <a:latin typeface="Poppins SemiBold" pitchFamily="34" charset="0"/>
-                <a:ea typeface="Poppins SemiBold" pitchFamily="34" charset="-122"/>
-                <a:cs typeface="Poppins SemiBold" pitchFamily="34" charset="-120"/>
+                <a:latin typeface="Poppins" pitchFamily="34" charset="0"/>
+                <a:ea typeface="Poppins" pitchFamily="34" charset="-122"/>
+                <a:cs typeface="Poppins" pitchFamily="34" charset="-120"/>
               </a:rPr>
               <a:t>05</a:t>
             </a:r>
@@ -8720,13 +8720,13 @@
               <a:buNone/>
             </a:pPr>
             <a:r>
-              <a:rPr lang="en-US" sz="1500" dirty="0">
+              <a:rPr lang="en-US" sz="1500" b="1" dirty="0">
                 <a:solidFill>
                   <a:srgbClr val="111111"/>
                 </a:solidFill>
-                <a:latin typeface="Poppins SemiBold" pitchFamily="34" charset="0"/>
-                <a:ea typeface="Poppins SemiBold" pitchFamily="34" charset="-122"/>
-                <a:cs typeface="Poppins SemiBold" pitchFamily="34" charset="-120"/>
+                <a:latin typeface="Poppins" pitchFamily="34" charset="0"/>
+                <a:ea typeface="Poppins" pitchFamily="34" charset="-122"/>
+                <a:cs typeface="Poppins" pitchFamily="34" charset="-120"/>
               </a:rPr>
               <a:t>Chasing two rabbits, catching neither.</a:t>
             </a:r>
@@ -8824,13 +8824,13 @@
               <a:buNone/>
             </a:pPr>
             <a:r>
-              <a:rPr lang="en-US" sz="2400" dirty="0">
+              <a:rPr lang="en-US" sz="2400" b="1" dirty="0">
                 <a:solidFill>
                   <a:srgbClr val="666666"/>
                 </a:solidFill>
-                <a:latin typeface="Poppins SemiBold" pitchFamily="34" charset="0"/>
-                <a:ea typeface="Poppins SemiBold" pitchFamily="34" charset="-122"/>
-                <a:cs typeface="Poppins SemiBold" pitchFamily="34" charset="-120"/>
+                <a:latin typeface="Poppins" pitchFamily="34" charset="0"/>
+                <a:ea typeface="Poppins" pitchFamily="34" charset="-122"/>
+                <a:cs typeface="Poppins" pitchFamily="34" charset="-120"/>
               </a:rPr>
               <a:t>06</a:t>
             </a:r>
@@ -8866,13 +8866,13 @@
               <a:buNone/>
             </a:pPr>
             <a:r>
-              <a:rPr lang="en-US" sz="1500" dirty="0">
+              <a:rPr lang="en-US" sz="1500" b="1" dirty="0">
                 <a:solidFill>
                   <a:srgbClr val="111111"/>
                 </a:solidFill>
-                <a:latin typeface="Poppins SemiBold" pitchFamily="34" charset="0"/>
-                <a:ea typeface="Poppins SemiBold" pitchFamily="34" charset="-122"/>
-                <a:cs typeface="Poppins SemiBold" pitchFamily="34" charset="-120"/>
+                <a:latin typeface="Poppins" pitchFamily="34" charset="0"/>
+                <a:ea typeface="Poppins" pitchFamily="34" charset="-122"/>
+                <a:cs typeface="Poppins" pitchFamily="34" charset="-120"/>
               </a:rPr>
               <a:t>In danger of dying with a beautiful corpse.</a:t>
             </a:r>
@@ -9002,13 +9002,13 @@
               <a:buNone/>
             </a:pPr>
             <a:r>
-              <a:rPr lang="en-US" sz="900" spc="200" kern="0" dirty="0">
+              <a:rPr lang="en-US" sz="900" b="1" spc="200" kern="0" dirty="0">
                 <a:solidFill>
                   <a:srgbClr val="111111"/>
                 </a:solidFill>
-                <a:latin typeface="Poppins SemiBold" pitchFamily="34" charset="0"/>
-                <a:ea typeface="Poppins SemiBold" pitchFamily="34" charset="-122"/>
-                <a:cs typeface="Poppins SemiBold" pitchFamily="34" charset="-120"/>
+                <a:latin typeface="Poppins" pitchFamily="34" charset="0"/>
+                <a:ea typeface="Poppins" pitchFamily="34" charset="-122"/>
+                <a:cs typeface="Poppins" pitchFamily="34" charset="-120"/>
               </a:rPr>
               <a:t>PART 01 · CONTEXT</a:t>
             </a:r>
@@ -9044,13 +9044,13 @@
               <a:buNone/>
             </a:pPr>
             <a:r>
-              <a:rPr lang="en-US" sz="4200" dirty="0">
+              <a:rPr lang="en-US" sz="4200" b="1" dirty="0">
                 <a:solidFill>
                   <a:srgbClr val="111111"/>
                 </a:solidFill>
-                <a:latin typeface="Poppins SemiBold" pitchFamily="34" charset="0"/>
-                <a:ea typeface="Poppins SemiBold" pitchFamily="34" charset="-122"/>
-                <a:cs typeface="Poppins SemiBold" pitchFamily="34" charset="-120"/>
+                <a:latin typeface="Poppins" pitchFamily="34" charset="0"/>
+                <a:ea typeface="Poppins" pitchFamily="34" charset="-122"/>
+                <a:cs typeface="Poppins" pitchFamily="34" charset="-120"/>
               </a:rPr>
               <a:t>The room the strategy has to work in.</a:t>
             </a:r>
@@ -9513,13 +9513,13 @@
               <a:buNone/>
             </a:pPr>
             <a:r>
-              <a:rPr lang="en-US" sz="900" spc="200" kern="0" dirty="0">
+              <a:rPr lang="en-US" sz="900" b="1" spc="200" kern="0" dirty="0">
                 <a:solidFill>
                   <a:srgbClr val="111111"/>
                 </a:solidFill>
-                <a:latin typeface="Poppins SemiBold" pitchFamily="34" charset="0"/>
-                <a:ea typeface="Poppins SemiBold" pitchFamily="34" charset="-122"/>
-                <a:cs typeface="Poppins SemiBold" pitchFamily="34" charset="-120"/>
+                <a:latin typeface="Poppins" pitchFamily="34" charset="0"/>
+                <a:ea typeface="Poppins" pitchFamily="34" charset="-122"/>
+                <a:cs typeface="Poppins" pitchFamily="34" charset="-120"/>
               </a:rPr>
               <a:t>PART 01 · CONTEXT</a:t>
             </a:r>
@@ -9555,13 +9555,13 @@
               <a:buNone/>
             </a:pPr>
             <a:r>
-              <a:rPr lang="en-US" sz="4200" dirty="0">
+              <a:rPr lang="en-US" sz="4200" b="1" dirty="0">
                 <a:solidFill>
                   <a:srgbClr val="111111"/>
                 </a:solidFill>
-                <a:latin typeface="Poppins SemiBold" pitchFamily="34" charset="0"/>
-                <a:ea typeface="Poppins SemiBold" pitchFamily="34" charset="-122"/>
-                <a:cs typeface="Poppins SemiBold" pitchFamily="34" charset="-120"/>
+                <a:latin typeface="Poppins" pitchFamily="34" charset="0"/>
+                <a:ea typeface="Poppins" pitchFamily="34" charset="-122"/>
+                <a:cs typeface="Poppins" pitchFamily="34" charset="-120"/>
               </a:rPr>
               <a:t>Tap Room is vanity. Refills are sanity.</a:t>
             </a:r>
@@ -9617,13 +9617,13 @@
               <a:buNone/>
             </a:pPr>
             <a:r>
-              <a:rPr lang="en-US" sz="6000" dirty="0">
+              <a:rPr lang="en-US" sz="6000" b="1" dirty="0">
                 <a:solidFill>
                   <a:srgbClr val="2D5BFF"/>
                 </a:solidFill>
-                <a:latin typeface="Poppins SemiBold" pitchFamily="34" charset="0"/>
-                <a:ea typeface="Poppins SemiBold" pitchFamily="34" charset="-122"/>
-                <a:cs typeface="Poppins SemiBold" pitchFamily="34" charset="-120"/>
+                <a:latin typeface="Poppins" pitchFamily="34" charset="0"/>
+                <a:ea typeface="Poppins" pitchFamily="34" charset="-122"/>
+                <a:cs typeface="Poppins" pitchFamily="34" charset="-120"/>
               </a:rPr>
               <a:t>96-113</a:t>
             </a:r>
@@ -9721,13 +9721,13 @@
               <a:buNone/>
             </a:pPr>
             <a:r>
-              <a:rPr lang="en-US" sz="6000" dirty="0">
+              <a:rPr lang="en-US" sz="6000" b="1" dirty="0">
                 <a:solidFill>
                   <a:srgbClr val="2D5BFF"/>
                 </a:solidFill>
-                <a:latin typeface="Poppins SemiBold" pitchFamily="34" charset="0"/>
-                <a:ea typeface="Poppins SemiBold" pitchFamily="34" charset="-122"/>
-                <a:cs typeface="Poppins SemiBold" pitchFamily="34" charset="-120"/>
+                <a:latin typeface="Poppins" pitchFamily="34" charset="0"/>
+                <a:ea typeface="Poppins" pitchFamily="34" charset="-122"/>
+                <a:cs typeface="Poppins" pitchFamily="34" charset="-120"/>
               </a:rPr>
               <a:t>56%</a:t>
             </a:r>
@@ -9825,13 +9825,13 @@
               <a:buNone/>
             </a:pPr>
             <a:r>
-              <a:rPr lang="en-US" sz="6000" dirty="0">
+              <a:rPr lang="en-US" sz="6000" b="1" dirty="0">
                 <a:solidFill>
                   <a:srgbClr val="2D5BFF"/>
                 </a:solidFill>
-                <a:latin typeface="Poppins SemiBold" pitchFamily="34" charset="0"/>
-                <a:ea typeface="Poppins SemiBold" pitchFamily="34" charset="-122"/>
-                <a:cs typeface="Poppins SemiBold" pitchFamily="34" charset="-120"/>
+                <a:latin typeface="Poppins" pitchFamily="34" charset="0"/>
+                <a:ea typeface="Poppins" pitchFamily="34" charset="-122"/>
+                <a:cs typeface="Poppins" pitchFamily="34" charset="-120"/>
               </a:rPr>
               <a:t>20%</a:t>
             </a:r>
@@ -10003,13 +10003,13 @@
               <a:buNone/>
             </a:pPr>
             <a:r>
-              <a:rPr lang="en-US" sz="900" spc="200" kern="0" dirty="0">
+              <a:rPr lang="en-US" sz="900" b="1" spc="200" kern="0" dirty="0">
                 <a:solidFill>
                   <a:srgbClr val="111111"/>
                 </a:solidFill>
-                <a:latin typeface="Poppins SemiBold" pitchFamily="34" charset="0"/>
-                <a:ea typeface="Poppins SemiBold" pitchFamily="34" charset="-122"/>
-                <a:cs typeface="Poppins SemiBold" pitchFamily="34" charset="-120"/>
+                <a:latin typeface="Poppins" pitchFamily="34" charset="0"/>
+                <a:ea typeface="Poppins" pitchFamily="34" charset="-122"/>
+                <a:cs typeface="Poppins" pitchFamily="34" charset="-120"/>
               </a:rPr>
               <a:t>PART 01 · CONTEXT</a:t>
             </a:r>
@@ -10045,13 +10045,13 @@
               <a:buNone/>
             </a:pPr>
             <a:r>
-              <a:rPr lang="en-US" sz="4200" dirty="0">
+              <a:rPr lang="en-US" sz="4200" b="1" dirty="0">
                 <a:solidFill>
                   <a:srgbClr val="111111"/>
                 </a:solidFill>
-                <a:latin typeface="Poppins SemiBold" pitchFamily="34" charset="0"/>
-                <a:ea typeface="Poppins SemiBold" pitchFamily="34" charset="-122"/>
-                <a:cs typeface="Poppins SemiBold" pitchFamily="34" charset="-120"/>
+                <a:latin typeface="Poppins" pitchFamily="34" charset="0"/>
+                <a:ea typeface="Poppins" pitchFamily="34" charset="-122"/>
+                <a:cs typeface="Poppins" pitchFamily="34" charset="-120"/>
               </a:rPr>
               <a:t>Two things to hold on to before anything is decided.</a:t>
             </a:r>
@@ -10107,13 +10107,13 @@
               <a:buNone/>
             </a:pPr>
             <a:r>
-              <a:rPr lang="en-US" sz="1400" dirty="0">
+              <a:rPr lang="en-US" sz="1400" b="1" dirty="0">
                 <a:solidFill>
                   <a:srgbClr val="111111"/>
                 </a:solidFill>
-                <a:latin typeface="Poppins SemiBold" pitchFamily="34" charset="0"/>
-                <a:ea typeface="Poppins SemiBold" pitchFamily="34" charset="-122"/>
-                <a:cs typeface="Poppins SemiBold" pitchFamily="34" charset="-120"/>
+                <a:latin typeface="Poppins" pitchFamily="34" charset="0"/>
+                <a:ea typeface="Poppins" pitchFamily="34" charset="-122"/>
+                <a:cs typeface="Poppins" pitchFamily="34" charset="-120"/>
               </a:rPr>
               <a:t>Who is the real enemy?</a:t>
             </a:r>
@@ -10211,13 +10211,13 @@
               <a:buNone/>
             </a:pPr>
             <a:r>
-              <a:rPr lang="en-US" sz="1400" dirty="0">
+              <a:rPr lang="en-US" sz="1400" b="1" dirty="0">
                 <a:solidFill>
                   <a:srgbClr val="111111"/>
                 </a:solidFill>
-                <a:latin typeface="Poppins SemiBold" pitchFamily="34" charset="0"/>
-                <a:ea typeface="Poppins SemiBold" pitchFamily="34" charset="-122"/>
-                <a:cs typeface="Poppins SemiBold" pitchFamily="34" charset="-120"/>
+                <a:latin typeface="Poppins" pitchFamily="34" charset="0"/>
+                <a:ea typeface="Poppins" pitchFamily="34" charset="-122"/>
+                <a:cs typeface="Poppins" pitchFamily="34" charset="-120"/>
               </a:rPr>
               <a:t>Handle the census with care</a:t>
             </a:r>
@@ -10348,13 +10348,13 @@
               <a:buNone/>
             </a:pPr>
             <a:r>
-              <a:rPr lang="en-US" sz="1400" spc="300" kern="0" dirty="0">
+              <a:rPr lang="en-US" sz="1400" b="1" spc="300" kern="0" dirty="0">
                 <a:solidFill>
                   <a:srgbClr val="FAF8F4"/>
                 </a:solidFill>
-                <a:latin typeface="Poppins SemiBold" pitchFamily="34" charset="0"/>
-                <a:ea typeface="Poppins SemiBold" pitchFamily="34" charset="-122"/>
-                <a:cs typeface="Poppins SemiBold" pitchFamily="34" charset="-120"/>
+                <a:latin typeface="Poppins" pitchFamily="34" charset="0"/>
+                <a:ea typeface="Poppins" pitchFamily="34" charset="-122"/>
+                <a:cs typeface="Poppins" pitchFamily="34" charset="-120"/>
               </a:rPr>
               <a:t>PART 02</a:t>
             </a:r>
@@ -10387,13 +10387,13 @@
               <a:buNone/>
             </a:pPr>
             <a:r>
-              <a:rPr lang="en-US" sz="12000" dirty="0">
+              <a:rPr lang="en-US" sz="12000" b="1" dirty="0">
                 <a:solidFill>
                   <a:srgbClr val="FAF8F4"/>
                 </a:solidFill>
-                <a:latin typeface="Poppins SemiBold" pitchFamily="34" charset="0"/>
-                <a:ea typeface="Poppins SemiBold" pitchFamily="34" charset="-122"/>
-                <a:cs typeface="Poppins SemiBold" pitchFamily="34" charset="-120"/>
+                <a:latin typeface="Poppins" pitchFamily="34" charset="0"/>
+                <a:ea typeface="Poppins" pitchFamily="34" charset="-122"/>
+                <a:cs typeface="Poppins" pitchFamily="34" charset="-120"/>
               </a:rPr>
               <a:t>Direction.</a:t>
             </a:r>
@@ -10426,13 +10426,13 @@
               <a:buNone/>
             </a:pPr>
             <a:r>
-              <a:rPr lang="en-US" sz="1600" dirty="0">
+              <a:rPr lang="en-US" sz="1600" b="1" dirty="0">
                 <a:solidFill>
                   <a:srgbClr val="FAF8F4"/>
                 </a:solidFill>
-                <a:latin typeface="Poppins SemiBold" pitchFamily="34" charset="0"/>
-                <a:ea typeface="Poppins SemiBold" pitchFamily="34" charset="-122"/>
-                <a:cs typeface="Poppins SemiBold" pitchFamily="34" charset="-120"/>
+                <a:latin typeface="Poppins" pitchFamily="34" charset="0"/>
+                <a:ea typeface="Poppins" pitchFamily="34" charset="-122"/>
+                <a:cs typeface="Poppins" pitchFamily="34" charset="-120"/>
               </a:rPr>
               <a:t>Ten moves. Five of them come first.</a:t>
             </a:r>
@@ -10497,13 +10497,13 @@
               <a:buNone/>
             </a:pPr>
             <a:r>
-              <a:rPr lang="en-US" sz="900" spc="200" kern="0" dirty="0">
+              <a:rPr lang="en-US" sz="900" b="1" spc="200" kern="0" dirty="0">
                 <a:solidFill>
                   <a:srgbClr val="111111"/>
                 </a:solidFill>
-                <a:latin typeface="Poppins SemiBold" pitchFamily="34" charset="0"/>
-                <a:ea typeface="Poppins SemiBold" pitchFamily="34" charset="-122"/>
-                <a:cs typeface="Poppins SemiBold" pitchFamily="34" charset="-120"/>
+                <a:latin typeface="Poppins" pitchFamily="34" charset="0"/>
+                <a:ea typeface="Poppins" pitchFamily="34" charset="-122"/>
+                <a:cs typeface="Poppins" pitchFamily="34" charset="-120"/>
               </a:rPr>
               <a:t>PART 02 · DIRECTION</a:t>
             </a:r>
@@ -10539,13 +10539,13 @@
               <a:buNone/>
             </a:pPr>
             <a:r>
-              <a:rPr lang="en-US" sz="4200" dirty="0">
+              <a:rPr lang="en-US" sz="4200" b="1" dirty="0">
                 <a:solidFill>
                   <a:srgbClr val="111111"/>
                 </a:solidFill>
-                <a:latin typeface="Poppins SemiBold" pitchFamily="34" charset="0"/>
-                <a:ea typeface="Poppins SemiBold" pitchFamily="34" charset="-122"/>
-                <a:cs typeface="Poppins SemiBold" pitchFamily="34" charset="-120"/>
+                <a:latin typeface="Poppins" pitchFamily="34" charset="0"/>
+                <a:ea typeface="Poppins" pitchFamily="34" charset="-122"/>
+                <a:cs typeface="Poppins" pitchFamily="34" charset="-120"/>
               </a:rPr>
               <a:t>Get the core right, then go for more.</a:t>
             </a:r>
@@ -10591,20 +10591,20 @@
                         <a:buNone/>
                       </a:pPr>
                       <a:r>
-                        <a:rPr lang="en-US" sz="900" spc="200" kern="0" dirty="0">
+                        <a:rPr lang="en-US" sz="900" b="1" spc="200" kern="0" dirty="0">
                           <a:solidFill>
                             <a:srgbClr val="111111"/>
                           </a:solidFill>
-                          <a:latin typeface="Poppins SemiBold" pitchFamily="34" charset="0"/>
-                          <a:ea typeface="Poppins SemiBold" pitchFamily="34" charset="-122"/>
-                          <a:cs typeface="Poppins SemiBold" pitchFamily="34" charset="-120"/>
+                          <a:latin typeface="Poppins" pitchFamily="34" charset="0"/>
+                          <a:ea typeface="Poppins" pitchFamily="34" charset="-122"/>
+                          <a:cs typeface="Poppins" pitchFamily="34" charset="-120"/>
                         </a:rPr>
                         <a:t>MOVE</a:t>
                       </a:r>
                       <a:endParaRPr lang="en-US" sz="900" dirty="0">
-                        <a:latin typeface="Poppins SemiBold" charset="0"/>
-                        <a:ea typeface="Poppins SemiBold" charset="0"/>
-                        <a:cs typeface="Poppins SemiBold" charset="0"/>
+                        <a:latin typeface="Poppins" charset="0"/>
+                        <a:ea typeface="Poppins" charset="0"/>
+                        <a:cs typeface="Poppins" charset="0"/>
                       </a:endParaRPr>
                     </a:p>
                   </a:txBody>
@@ -10641,20 +10641,20 @@
                         <a:buNone/>
                       </a:pPr>
                       <a:r>
-                        <a:rPr lang="en-US" sz="900" spc="200" kern="0" dirty="0">
+                        <a:rPr lang="en-US" sz="900" b="1" spc="200" kern="0" dirty="0">
                           <a:solidFill>
                             <a:srgbClr val="111111"/>
                           </a:solidFill>
-                          <a:latin typeface="Poppins SemiBold" pitchFamily="34" charset="0"/>
-                          <a:ea typeface="Poppins SemiBold" pitchFamily="34" charset="-122"/>
-                          <a:cs typeface="Poppins SemiBold" pitchFamily="34" charset="-120"/>
+                          <a:latin typeface="Poppins" pitchFamily="34" charset="0"/>
+                          <a:ea typeface="Poppins" pitchFamily="34" charset="-122"/>
+                          <a:cs typeface="Poppins" pitchFamily="34" charset="-120"/>
                         </a:rPr>
                         <a:t>THE SHIFT</a:t>
                       </a:r>
                       <a:endParaRPr lang="en-US" sz="900" dirty="0">
-                        <a:latin typeface="Poppins SemiBold" charset="0"/>
-                        <a:ea typeface="Poppins SemiBold" charset="0"/>
-                        <a:cs typeface="Poppins SemiBold" charset="0"/>
+                        <a:latin typeface="Poppins" charset="0"/>
+                        <a:ea typeface="Poppins" charset="0"/>
+                        <a:cs typeface="Poppins" charset="0"/>
                       </a:endParaRPr>
                     </a:p>
                   </a:txBody>
@@ -10691,20 +10691,20 @@
                         <a:buNone/>
                       </a:pPr>
                       <a:r>
-                        <a:rPr lang="en-US" sz="900" spc="200" kern="0" dirty="0">
+                        <a:rPr lang="en-US" sz="900" b="1" spc="200" kern="0" dirty="0">
                           <a:solidFill>
                             <a:srgbClr val="111111"/>
                           </a:solidFill>
-                          <a:latin typeface="Poppins SemiBold" pitchFamily="34" charset="0"/>
-                          <a:ea typeface="Poppins SemiBold" pitchFamily="34" charset="-122"/>
-                          <a:cs typeface="Poppins SemiBold" pitchFamily="34" charset="-120"/>
+                          <a:latin typeface="Poppins" pitchFamily="34" charset="0"/>
+                          <a:ea typeface="Poppins" pitchFamily="34" charset="-122"/>
+                          <a:cs typeface="Poppins" pitchFamily="34" charset="-120"/>
                         </a:rPr>
                         <a:t>PROOF</a:t>
                       </a:r>
                       <a:endParaRPr lang="en-US" sz="900" dirty="0">
-                        <a:latin typeface="Poppins SemiBold" charset="0"/>
-                        <a:ea typeface="Poppins SemiBold" charset="0"/>
-                        <a:cs typeface="Poppins SemiBold" charset="0"/>
+                        <a:latin typeface="Poppins" charset="0"/>
+                        <a:ea typeface="Poppins" charset="0"/>
+                        <a:cs typeface="Poppins" charset="0"/>
                       </a:endParaRPr>
                     </a:p>
                   </a:txBody>
@@ -10741,20 +10741,20 @@
                         <a:buNone/>
                       </a:pPr>
                       <a:r>
-                        <a:rPr lang="en-US" sz="900" spc="200" kern="0" dirty="0">
+                        <a:rPr lang="en-US" sz="900" b="1" spc="200" kern="0" dirty="0">
                           <a:solidFill>
                             <a:srgbClr val="111111"/>
                           </a:solidFill>
-                          <a:latin typeface="Poppins SemiBold" pitchFamily="34" charset="0"/>
-                          <a:ea typeface="Poppins SemiBold" pitchFamily="34" charset="-122"/>
-                          <a:cs typeface="Poppins SemiBold" pitchFamily="34" charset="-120"/>
+                          <a:latin typeface="Poppins" pitchFamily="34" charset="0"/>
+                          <a:ea typeface="Poppins" pitchFamily="34" charset="-122"/>
+                          <a:cs typeface="Poppins" pitchFamily="34" charset="-120"/>
                         </a:rPr>
                         <a:t>FIRST STEPS</a:t>
                       </a:r>
                       <a:endParaRPr lang="en-US" sz="900" dirty="0">
-                        <a:latin typeface="Poppins SemiBold" charset="0"/>
-                        <a:ea typeface="Poppins SemiBold" charset="0"/>
-                        <a:cs typeface="Poppins SemiBold" charset="0"/>
+                        <a:latin typeface="Poppins" charset="0"/>
+                        <a:ea typeface="Poppins" charset="0"/>
+                        <a:cs typeface="Poppins" charset="0"/>
                       </a:endParaRPr>
                     </a:p>
                   </a:txBody>
@@ -10796,20 +10796,20 @@
                         <a:buNone/>
                       </a:pPr>
                       <a:r>
-                        <a:rPr lang="en-US" sz="1100" dirty="0">
+                        <a:rPr lang="en-US" sz="1100" b="1" dirty="0">
                           <a:solidFill>
                             <a:srgbClr val="111111"/>
                           </a:solidFill>
-                          <a:latin typeface="Poppins SemiBold" pitchFamily="34" charset="0"/>
-                          <a:ea typeface="Poppins SemiBold" pitchFamily="34" charset="-122"/>
-                          <a:cs typeface="Poppins SemiBold" pitchFamily="34" charset="-120"/>
+                          <a:latin typeface="Poppins" pitchFamily="34" charset="0"/>
+                          <a:ea typeface="Poppins" pitchFamily="34" charset="-122"/>
+                          <a:cs typeface="Poppins" pitchFamily="34" charset="-120"/>
                         </a:rPr>
                         <a:t>01  Tap Room: pause and pivot</a:t>
                       </a:r>
                       <a:endParaRPr lang="en-US" sz="1100" dirty="0">
-                        <a:latin typeface="Poppins SemiBold" charset="0"/>
-                        <a:ea typeface="Poppins SemiBold" charset="0"/>
-                        <a:cs typeface="Poppins SemiBold" charset="0"/>
+                        <a:latin typeface="Poppins" charset="0"/>
+                        <a:ea typeface="Poppins" charset="0"/>
+                        <a:cs typeface="Poppins" charset="0"/>
                       </a:endParaRPr>
                     </a:p>
                   </a:txBody>
@@ -10998,20 +10998,20 @@
                         <a:buNone/>
                       </a:pPr>
                       <a:r>
-                        <a:rPr lang="en-US" sz="1100" dirty="0">
+                        <a:rPr lang="en-US" sz="1100" b="1" dirty="0">
                           <a:solidFill>
                             <a:srgbClr val="111111"/>
                           </a:solidFill>
-                          <a:latin typeface="Poppins SemiBold" pitchFamily="34" charset="0"/>
-                          <a:ea typeface="Poppins SemiBold" pitchFamily="34" charset="-122"/>
-                          <a:cs typeface="Poppins SemiBold" pitchFamily="34" charset="-120"/>
+                          <a:latin typeface="Poppins" pitchFamily="34" charset="0"/>
+                          <a:ea typeface="Poppins" pitchFamily="34" charset="-122"/>
+                          <a:cs typeface="Poppins" pitchFamily="34" charset="-120"/>
                         </a:rPr>
                         <a:t>02  Convert the owners already sold</a:t>
                       </a:r>
                       <a:endParaRPr lang="en-US" sz="1100" dirty="0">
-                        <a:latin typeface="Poppins SemiBold" charset="0"/>
-                        <a:ea typeface="Poppins SemiBold" charset="0"/>
-                        <a:cs typeface="Poppins SemiBold" charset="0"/>
+                        <a:latin typeface="Poppins" charset="0"/>
+                        <a:ea typeface="Poppins" charset="0"/>
+                        <a:cs typeface="Poppins" charset="0"/>
                       </a:endParaRPr>
                     </a:p>
                   </a:txBody>
@@ -11200,20 +11200,20 @@
                         <a:buNone/>
                       </a:pPr>
                       <a:r>
-                        <a:rPr lang="en-US" sz="1100" dirty="0">
+                        <a:rPr lang="en-US" sz="1100" b="1" dirty="0">
                           <a:solidFill>
                             <a:srgbClr val="111111"/>
                           </a:solidFill>
-                          <a:latin typeface="Poppins SemiBold" pitchFamily="34" charset="0"/>
-                          <a:ea typeface="Poppins SemiBold" pitchFamily="34" charset="-122"/>
-                          <a:cs typeface="Poppins SemiBold" pitchFamily="34" charset="-120"/>
+                          <a:latin typeface="Poppins" pitchFamily="34" charset="0"/>
+                          <a:ea typeface="Poppins" pitchFamily="34" charset="-122"/>
+                          <a:cs typeface="Poppins" pitchFamily="34" charset="-120"/>
                         </a:rPr>
                         <a:t>03  Remove all friction in refills</a:t>
                       </a:r>
                       <a:endParaRPr lang="en-US" sz="1100" dirty="0">
-                        <a:latin typeface="Poppins SemiBold" charset="0"/>
-                        <a:ea typeface="Poppins SemiBold" charset="0"/>
-                        <a:cs typeface="Poppins SemiBold" charset="0"/>
+                        <a:latin typeface="Poppins" charset="0"/>
+                        <a:ea typeface="Poppins" charset="0"/>
+                        <a:cs typeface="Poppins" charset="0"/>
                       </a:endParaRPr>
                     </a:p>
                   </a:txBody>
@@ -11402,20 +11402,20 @@
                         <a:buNone/>
                       </a:pPr>
                       <a:r>
-                        <a:rPr lang="en-US" sz="1100" dirty="0">
+                        <a:rPr lang="en-US" sz="1100" b="1" dirty="0">
                           <a:solidFill>
                             <a:srgbClr val="111111"/>
                           </a:solidFill>
-                          <a:latin typeface="Poppins SemiBold" pitchFamily="34" charset="0"/>
-                          <a:ea typeface="Poppins SemiBold" pitchFamily="34" charset="-122"/>
-                          <a:cs typeface="Poppins SemiBold" pitchFamily="34" charset="-120"/>
+                          <a:latin typeface="Poppins" pitchFamily="34" charset="0"/>
+                          <a:ea typeface="Poppins" pitchFamily="34" charset="-122"/>
+                          <a:cs typeface="Poppins" pitchFamily="34" charset="-120"/>
                         </a:rPr>
                         <a:t>04  Rationalise the range</a:t>
                       </a:r>
                       <a:endParaRPr lang="en-US" sz="1100" dirty="0">
-                        <a:latin typeface="Poppins SemiBold" charset="0"/>
-                        <a:ea typeface="Poppins SemiBold" charset="0"/>
-                        <a:cs typeface="Poppins SemiBold" charset="0"/>
+                        <a:latin typeface="Poppins" charset="0"/>
+                        <a:ea typeface="Poppins" charset="0"/>
+                        <a:cs typeface="Poppins" charset="0"/>
                       </a:endParaRPr>
                     </a:p>
                   </a:txBody>
@@ -11604,20 +11604,20 @@
                         <a:buNone/>
                       </a:pPr>
                       <a:r>
-                        <a:rPr lang="en-US" sz="1100" dirty="0">
+                        <a:rPr lang="en-US" sz="1100" b="1" dirty="0">
                           <a:solidFill>
                             <a:srgbClr val="111111"/>
                           </a:solidFill>
-                          <a:latin typeface="Poppins SemiBold" pitchFamily="34" charset="0"/>
-                          <a:ea typeface="Poppins SemiBold" pitchFamily="34" charset="-122"/>
-                          <a:cs typeface="Poppins SemiBold" pitchFamily="34" charset="-120"/>
+                          <a:latin typeface="Poppins" pitchFamily="34" charset="0"/>
+                          <a:ea typeface="Poppins" pitchFamily="34" charset="-122"/>
+                          <a:cs typeface="Poppins" pitchFamily="34" charset="-120"/>
                         </a:rPr>
                         <a:t>05  Ride the wellness wave</a:t>
                       </a:r>
                       <a:endParaRPr lang="en-US" sz="1100" dirty="0">
-                        <a:latin typeface="Poppins SemiBold" charset="0"/>
-                        <a:ea typeface="Poppins SemiBold" charset="0"/>
-                        <a:cs typeface="Poppins SemiBold" charset="0"/>
+                        <a:latin typeface="Poppins" charset="0"/>
+                        <a:ea typeface="Poppins" charset="0"/>
+                        <a:cs typeface="Poppins" charset="0"/>
                       </a:endParaRPr>
                     </a:p>
                   </a:txBody>

--- a/00 Admin/06 Presentations/JP_TapThat_ThePivot_v03.pptx
+++ b/00 Admin/06 Presentations/JP_TapThat_ThePivot_v03.pptx
@@ -4223,7 +4223,7 @@
                 <a:ea typeface="Poppins" pitchFamily="34" charset="-122"/>
                 <a:cs typeface="Poppins" pitchFamily="34" charset="-120"/>
               </a:rPr>
-              <a:t>Format taken from Tap That's own in-venue flyer. Photography is the August site visit, not stock. These sit in Tap That's brand, not ours, because they are the client's collateral. Print-ready A4 at 200 dpi.</a:t>
+              <a:t>Format taken from Tap That's own in-venue flyer. The plates are commissioned concept photography: product and room, no people, no set type. A second set built on August site-visit photography is in the folder, for anything that goes out as their own marketing. These sit in Tap That's brand, not ours, because they are the client's collateral. Print-ready A4 at 200 dpi.</a:t>
             </a:r>
             <a:endParaRPr lang="en-US" sz="1100" dirty="0"/>
           </a:p>
